--- a/UBL.pptx
+++ b/UBL.pptx
@@ -5,10 +5,10 @@
     <p:sldMasterId id="2147483648" r:id="rId1"/>
   </p:sldMasterIdLst>
   <p:notesMasterIdLst>
-    <p:notesMasterId r:id="rId20"/>
+    <p:notesMasterId r:id="rId21"/>
   </p:notesMasterIdLst>
   <p:handoutMasterIdLst>
-    <p:handoutMasterId r:id="rId21"/>
+    <p:handoutMasterId r:id="rId22"/>
   </p:handoutMasterIdLst>
   <p:sldIdLst>
     <p:sldId id="266" r:id="rId2"/>
@@ -26,9 +26,10 @@
     <p:sldId id="306" r:id="rId14"/>
     <p:sldId id="300" r:id="rId15"/>
     <p:sldId id="309" r:id="rId16"/>
-    <p:sldId id="307" r:id="rId17"/>
-    <p:sldId id="308" r:id="rId18"/>
-    <p:sldId id="295" r:id="rId19"/>
+    <p:sldId id="310" r:id="rId17"/>
+    <p:sldId id="307" r:id="rId18"/>
+    <p:sldId id="308" r:id="rId19"/>
+    <p:sldId id="295" r:id="rId20"/>
   </p:sldIdLst>
   <p:sldSz cx="12192000" cy="6858000"/>
   <p:notesSz cx="6858000" cy="9144000"/>
@@ -217,7 +218,7 @@
           <a:p>
             <a:fld id="{0F9B84EA-7D68-4D60-9CB1-D50884785D1C}" type="datetimeFigureOut">
               <a:rPr lang="zh-CN" altLang="en-US" smtClean="0"/>
-              <a:t>2026/4/2</a:t>
+              <a:t>2026/4/16</a:t>
             </a:fld>
             <a:endParaRPr lang="zh-CN" altLang="en-US"/>
           </a:p>
@@ -388,7 +389,7 @@
           <a:p>
             <a:fld id="{7B469C68-B96B-4B00-A936-4ED691395EEA}" type="datetimeFigureOut">
               <a:rPr lang="zh-CN" altLang="en-US" smtClean="0"/>
-              <a:t>2026/4/2</a:t>
+              <a:t>2026/4/16</a:t>
             </a:fld>
             <a:endParaRPr lang="zh-CN" altLang="en-US" dirty="0"/>
           </a:p>
@@ -1237,6 +1238,85 @@
         <p:cNvPr id="1" name="">
           <a:extLst>
             <a:ext uri="{FF2B5EF4-FFF2-40B4-BE49-F238E27FC236}">
+              <a16:creationId xmlns:a16="http://schemas.microsoft.com/office/drawing/2014/main" id="{4584CC6D-02E7-1D77-8E6E-BE7FAEEFDAC7}"/>
+            </a:ext>
+          </a:extLst>
+        </p:cNvPr>
+        <p:cNvGrpSpPr/>
+        <p:nvPr/>
+      </p:nvGrpSpPr>
+      <p:grpSpPr>
+        <a:xfrm>
+          <a:off x="0" y="0"/>
+          <a:ext cx="0" cy="0"/>
+          <a:chOff x="0" y="0"/>
+          <a:chExt cx="0" cy="0"/>
+        </a:xfrm>
+      </p:grpSpPr>
+      <p:sp>
+        <p:nvSpPr>
+          <p:cNvPr id="1048728" name="幻灯片图像占位符 1">
+            <a:extLst>
+              <a:ext uri="{FF2B5EF4-FFF2-40B4-BE49-F238E27FC236}">
+                <a16:creationId xmlns:a16="http://schemas.microsoft.com/office/drawing/2014/main" id="{B9234B08-F03C-08E8-1C6E-5852873D7F9F}"/>
+              </a:ext>
+            </a:extLst>
+          </p:cNvPr>
+          <p:cNvSpPr>
+            <a:spLocks noGrp="1" noRot="1" noChangeAspect="1"/>
+          </p:cNvSpPr>
+          <p:nvPr>
+            <p:ph type="sldImg" idx="2"/>
+          </p:nvPr>
+        </p:nvSpPr>
+        <p:spPr/>
+      </p:sp>
+      <p:sp>
+        <p:nvSpPr>
+          <p:cNvPr id="1048729" name="文本占位符 2">
+            <a:extLst>
+              <a:ext uri="{FF2B5EF4-FFF2-40B4-BE49-F238E27FC236}">
+                <a16:creationId xmlns:a16="http://schemas.microsoft.com/office/drawing/2014/main" id="{4F0764F7-233A-1AE1-979B-A798D3A6D4AA}"/>
+              </a:ext>
+            </a:extLst>
+          </p:cNvPr>
+          <p:cNvSpPr>
+            <a:spLocks noGrp="1"/>
+          </p:cNvSpPr>
+          <p:nvPr>
+            <p:ph type="body" idx="3"/>
+          </p:nvPr>
+        </p:nvSpPr>
+        <p:spPr/>
+        <p:txBody>
+          <a:bodyPr/>
+          <a:lstStyle/>
+          <a:p>
+            <a:endParaRPr lang="zh-CN" altLang="en-US" dirty="0"/>
+          </a:p>
+        </p:txBody>
+      </p:sp>
+    </p:spTree>
+    <p:extLst>
+      <p:ext uri="{BB962C8B-B14F-4D97-AF65-F5344CB8AC3E}">
+        <p14:creationId xmlns:p14="http://schemas.microsoft.com/office/powerpoint/2010/main" val="2395442992"/>
+      </p:ext>
+    </p:extLst>
+  </p:cSld>
+  <p:clrMapOvr>
+    <a:masterClrMapping/>
+  </p:clrMapOvr>
+</p:notes>
+</file>
+
+<file path=ppt/notesSlides/notesSlide17.xml><?xml version="1.0" encoding="utf-8"?>
+<p:notes xmlns:a="http://schemas.openxmlformats.org/drawingml/2006/main" xmlns:r="http://schemas.openxmlformats.org/officeDocument/2006/relationships" xmlns:p="http://schemas.openxmlformats.org/presentationml/2006/main">
+  <p:cSld>
+    <p:spTree>
+      <p:nvGrpSpPr>
+        <p:cNvPr id="1" name="">
+          <a:extLst>
+            <a:ext uri="{FF2B5EF4-FFF2-40B4-BE49-F238E27FC236}">
               <a16:creationId xmlns:a16="http://schemas.microsoft.com/office/drawing/2014/main" id="{CF5469CA-DAD1-ED80-63E5-471C35023697}"/>
             </a:ext>
           </a:extLst>
@@ -1308,7 +1388,7 @@
 </p:notes>
 </file>
 
-<file path=ppt/notesSlides/notesSlide17.xml><?xml version="1.0" encoding="utf-8"?>
+<file path=ppt/notesSlides/notesSlide18.xml><?xml version="1.0" encoding="utf-8"?>
 <p:notes xmlns:a="http://schemas.openxmlformats.org/drawingml/2006/main" xmlns:r="http://schemas.openxmlformats.org/officeDocument/2006/relationships" xmlns:p="http://schemas.openxmlformats.org/presentationml/2006/main">
   <p:cSld>
     <p:spTree>
@@ -1387,7 +1467,7 @@
 </p:notes>
 </file>
 
-<file path=ppt/notesSlides/notesSlide18.xml><?xml version="1.0" encoding="utf-8"?>
+<file path=ppt/notesSlides/notesSlide19.xml><?xml version="1.0" encoding="utf-8"?>
 <p:notes xmlns:a="http://schemas.openxmlformats.org/drawingml/2006/main" xmlns:r="http://schemas.openxmlformats.org/officeDocument/2006/relationships" xmlns:p="http://schemas.openxmlformats.org/presentationml/2006/main">
   <p:cSld>
     <p:spTree>
@@ -2105,7 +2185,7 @@
           <a:p>
             <a:fld id="{4C2CB708-664F-4770-AECF-BA1A1B220D57}" type="datetimeFigureOut">
               <a:rPr lang="zh-CN" altLang="en-US" smtClean="0"/>
-              <a:t>2026/4/2</a:t>
+              <a:t>2026/4/16</a:t>
             </a:fld>
             <a:endParaRPr lang="zh-CN" altLang="en-US"/>
           </a:p>
@@ -2194,13 +2274,13 @@
   <p:clrMapOvr>
     <a:masterClrMapping/>
   </p:clrMapOvr>
-  <mc:AlternateContent xmlns:mc="http://schemas.openxmlformats.org/markup-compatibility/2006">
-    <mc:Choice xmlns:p14="http://schemas.microsoft.com/office/powerpoint/2010/main" Requires="p14">
+  <mc:AlternateContent xmlns:mc="http://schemas.openxmlformats.org/markup-compatibility/2006" xmlns:p14="http://schemas.microsoft.com/office/powerpoint/2010/main">
+    <mc:Choice Requires="p14">
       <p:transition spd="slow">
         <p14:reveal/>
       </p:transition>
     </mc:Choice>
-    <mc:Fallback>
+    <mc:Fallback xmlns="">
       <p:transition spd="slow">
         <p:fade/>
       </p:transition>
@@ -2393,7 +2473,7 @@
           <a:p>
             <a:fld id="{4C2CB708-664F-4770-AECF-BA1A1B220D57}" type="datetimeFigureOut">
               <a:rPr lang="zh-CN" altLang="en-US" smtClean="0"/>
-              <a:t>2026/4/2</a:t>
+              <a:t>2026/4/16</a:t>
             </a:fld>
             <a:endParaRPr lang="zh-CN" altLang="en-US"/>
           </a:p>
@@ -2544,13 +2624,13 @@
   <p:clrMapOvr>
     <a:masterClrMapping/>
   </p:clrMapOvr>
-  <mc:AlternateContent xmlns:mc="http://schemas.openxmlformats.org/markup-compatibility/2006">
-    <mc:Choice xmlns:p14="http://schemas.microsoft.com/office/powerpoint/2010/main" Requires="p14">
+  <mc:AlternateContent xmlns:mc="http://schemas.openxmlformats.org/markup-compatibility/2006" xmlns:p14="http://schemas.microsoft.com/office/powerpoint/2010/main">
+    <mc:Choice Requires="p14">
       <p:transition spd="slow">
         <p14:reveal/>
       </p:transition>
     </mc:Choice>
-    <mc:Fallback>
+    <mc:Fallback xmlns="">
       <p:transition spd="slow">
         <p:fade/>
       </p:transition>
@@ -2663,7 +2743,7 @@
           <a:p>
             <a:fld id="{4C2CB708-664F-4770-AECF-BA1A1B220D57}" type="datetimeFigureOut">
               <a:rPr lang="zh-CN" altLang="en-US" smtClean="0"/>
-              <a:t>2026/4/2</a:t>
+              <a:t>2026/4/16</a:t>
             </a:fld>
             <a:endParaRPr lang="zh-CN" altLang="en-US"/>
           </a:p>
@@ -2752,13 +2832,13 @@
   <p:clrMapOvr>
     <a:masterClrMapping/>
   </p:clrMapOvr>
-  <mc:AlternateContent xmlns:mc="http://schemas.openxmlformats.org/markup-compatibility/2006">
-    <mc:Choice xmlns:p14="http://schemas.microsoft.com/office/powerpoint/2010/main" Requires="p14">
+  <mc:AlternateContent xmlns:mc="http://schemas.openxmlformats.org/markup-compatibility/2006" xmlns:p14="http://schemas.microsoft.com/office/powerpoint/2010/main">
+    <mc:Choice Requires="p14">
       <p:transition spd="slow">
         <p14:reveal/>
       </p:transition>
     </mc:Choice>
-    <mc:Fallback>
+    <mc:Fallback xmlns="">
       <p:transition spd="slow">
         <p:fade/>
       </p:transition>
@@ -2871,7 +2951,7 @@
           <a:p>
             <a:fld id="{4C2CB708-664F-4770-AECF-BA1A1B220D57}" type="datetimeFigureOut">
               <a:rPr lang="zh-CN" altLang="en-US" smtClean="0"/>
-              <a:t>2026/4/2</a:t>
+              <a:t>2026/4/16</a:t>
             </a:fld>
             <a:endParaRPr lang="zh-CN" altLang="en-US"/>
           </a:p>
@@ -2960,13 +3040,13 @@
   <p:clrMapOvr>
     <a:masterClrMapping/>
   </p:clrMapOvr>
-  <mc:AlternateContent xmlns:mc="http://schemas.openxmlformats.org/markup-compatibility/2006">
-    <mc:Choice xmlns:p14="http://schemas.microsoft.com/office/powerpoint/2010/main" Requires="p14">
+  <mc:AlternateContent xmlns:mc="http://schemas.openxmlformats.org/markup-compatibility/2006" xmlns:p14="http://schemas.microsoft.com/office/powerpoint/2010/main">
+    <mc:Choice Requires="p14">
       <p:transition spd="slow">
         <p14:reveal/>
       </p:transition>
     </mc:Choice>
-    <mc:Fallback>
+    <mc:Fallback xmlns="">
       <p:transition spd="slow">
         <p:fade/>
       </p:transition>
@@ -3079,7 +3159,7 @@
           <a:p>
             <a:fld id="{4C2CB708-664F-4770-AECF-BA1A1B220D57}" type="datetimeFigureOut">
               <a:rPr lang="zh-CN" altLang="en-US" smtClean="0"/>
-              <a:t>2026/4/2</a:t>
+              <a:t>2026/4/16</a:t>
             </a:fld>
             <a:endParaRPr lang="zh-CN" altLang="en-US"/>
           </a:p>
@@ -3168,13 +3248,13 @@
   <p:clrMapOvr>
     <a:masterClrMapping/>
   </p:clrMapOvr>
-  <mc:AlternateContent xmlns:mc="http://schemas.openxmlformats.org/markup-compatibility/2006">
-    <mc:Choice xmlns:p14="http://schemas.microsoft.com/office/powerpoint/2010/main" Requires="p14">
+  <mc:AlternateContent xmlns:mc="http://schemas.openxmlformats.org/markup-compatibility/2006" xmlns:p14="http://schemas.microsoft.com/office/powerpoint/2010/main">
+    <mc:Choice Requires="p14">
       <p:transition spd="slow">
         <p14:reveal/>
       </p:transition>
     </mc:Choice>
-    <mc:Fallback>
+    <mc:Fallback xmlns="">
       <p:transition spd="slow">
         <p:fade/>
       </p:transition>
@@ -3287,7 +3367,7 @@
           <a:p>
             <a:fld id="{4C2CB708-664F-4770-AECF-BA1A1B220D57}" type="datetimeFigureOut">
               <a:rPr lang="zh-CN" altLang="en-US" smtClean="0"/>
-              <a:t>2026/4/2</a:t>
+              <a:t>2026/4/16</a:t>
             </a:fld>
             <a:endParaRPr lang="zh-CN" altLang="en-US"/>
           </a:p>
@@ -3376,13 +3456,13 @@
   <p:clrMapOvr>
     <a:masterClrMapping/>
   </p:clrMapOvr>
-  <mc:AlternateContent xmlns:mc="http://schemas.openxmlformats.org/markup-compatibility/2006">
-    <mc:Choice xmlns:p14="http://schemas.microsoft.com/office/powerpoint/2010/main" Requires="p14">
+  <mc:AlternateContent xmlns:mc="http://schemas.openxmlformats.org/markup-compatibility/2006" xmlns:p14="http://schemas.microsoft.com/office/powerpoint/2010/main">
+    <mc:Choice Requires="p14">
       <p:transition spd="slow">
         <p14:reveal/>
       </p:transition>
     </mc:Choice>
-    <mc:Fallback>
+    <mc:Fallback xmlns="">
       <p:transition spd="slow">
         <p:fade/>
       </p:transition>
@@ -3451,7 +3531,7 @@
           <a:p>
             <a:fld id="{4C2CB708-664F-4770-AECF-BA1A1B220D57}" type="datetimeFigureOut">
               <a:rPr lang="zh-CN" altLang="en-US" smtClean="0"/>
-              <a:t>2026/4/2</a:t>
+              <a:t>2026/4/16</a:t>
             </a:fld>
             <a:endParaRPr lang="zh-CN" altLang="en-US"/>
           </a:p>
@@ -3546,13 +3626,13 @@
     <p:sldLayoutId id="2147483653" r:id="rId5"/>
     <p:sldLayoutId id="2147483654" r:id="rId6"/>
   </p:sldLayoutIdLst>
-  <mc:AlternateContent xmlns:mc="http://schemas.openxmlformats.org/markup-compatibility/2006">
-    <mc:Choice xmlns:p14="http://schemas.microsoft.com/office/powerpoint/2010/main" Requires="p14">
+  <mc:AlternateContent xmlns:mc="http://schemas.openxmlformats.org/markup-compatibility/2006" xmlns:p14="http://schemas.microsoft.com/office/powerpoint/2010/main">
+    <mc:Choice Requires="p14">
       <p:transition spd="slow">
         <p14:reveal/>
       </p:transition>
     </mc:Choice>
-    <mc:Fallback>
+    <mc:Fallback xmlns="">
       <p:transition spd="slow">
         <p:fade/>
       </p:transition>
@@ -4420,13 +4500,13 @@
   <p:clrMapOvr>
     <a:masterClrMapping/>
   </p:clrMapOvr>
-  <mc:AlternateContent xmlns:mc="http://schemas.openxmlformats.org/markup-compatibility/2006">
-    <mc:Choice xmlns:p14="http://schemas.microsoft.com/office/powerpoint/2010/main" Requires="p14">
+  <mc:AlternateContent xmlns:mc="http://schemas.openxmlformats.org/markup-compatibility/2006" xmlns:p14="http://schemas.microsoft.com/office/powerpoint/2010/main">
+    <mc:Choice Requires="p14">
       <p:transition spd="slow">
         <p14:reveal/>
       </p:transition>
     </mc:Choice>
-    <mc:Fallback>
+    <mc:Fallback xmlns="">
       <p:transition spd="slow">
         <p:fade/>
       </p:transition>
@@ -5218,7 +5298,7 @@
         <p:spPr>
           <a:xfrm>
             <a:off x="424740" y="822170"/>
-            <a:ext cx="2975495" cy="461665"/>
+            <a:ext cx="2359941" cy="461665"/>
           </a:xfrm>
           <a:prstGeom prst="rect">
             <a:avLst/>
@@ -5237,7 +5317,7 @@
                 </a:solidFill>
                 <a:latin typeface="微软雅黑"/>
               </a:rPr>
-              <a:t>内存映像空间 </a:t>
+              <a:t>映像空间 </a:t>
             </a:r>
             <a:r>
               <a:rPr lang="en-US" altLang="zh-CN" sz="2400" b="1" dirty="0">
@@ -5370,13 +5450,13 @@
   <p:clrMapOvr>
     <a:masterClrMapping/>
   </p:clrMapOvr>
-  <mc:AlternateContent xmlns:mc="http://schemas.openxmlformats.org/markup-compatibility/2006">
-    <mc:Choice xmlns:p14="http://schemas.microsoft.com/office/powerpoint/2010/main" Requires="p14">
+  <mc:AlternateContent xmlns:mc="http://schemas.openxmlformats.org/markup-compatibility/2006" xmlns:p14="http://schemas.microsoft.com/office/powerpoint/2010/main">
+    <mc:Choice Requires="p14">
       <p:transition spd="slow">
         <p14:reveal/>
       </p:transition>
     </mc:Choice>
-    <mc:Fallback>
+    <mc:Fallback xmlns="">
       <p:transition spd="slow">
         <p:fade/>
       </p:transition>
@@ -6324,7 +6404,7 @@
               <a:rPr lang="zh-CN" altLang="en-US" dirty="0">
                 <a:latin typeface="微软雅黑"/>
               </a:rPr>
-              <a:t>的学习中，常常只会考虑一根时钟线的情况，这是因为我们暂时忽略了时钟频率对不同设备的影响</a:t>
+              <a:t>的学习中，常常只会考虑一根时钟线的情况，这是因为我们暂时不需要关注时钟频率对不同设备的影响（只专注于当前设备的开发）</a:t>
             </a:r>
           </a:p>
           <a:p>
@@ -6355,13 +6435,13 @@
   <p:clrMapOvr>
     <a:masterClrMapping/>
   </p:clrMapOvr>
-  <mc:AlternateContent xmlns:mc="http://schemas.openxmlformats.org/markup-compatibility/2006">
-    <mc:Choice xmlns:p14="http://schemas.microsoft.com/office/powerpoint/2010/main" Requires="p14">
+  <mc:AlternateContent xmlns:mc="http://schemas.openxmlformats.org/markup-compatibility/2006" xmlns:p14="http://schemas.microsoft.com/office/powerpoint/2010/main">
+    <mc:Choice Requires="p14">
       <p:transition spd="slow">
         <p14:reveal/>
       </p:transition>
     </mc:Choice>
-    <mc:Fallback>
+    <mc:Fallback xmlns="">
       <p:transition spd="slow">
         <p:fade/>
       </p:transition>
@@ -7383,13 +7463,13 @@
   <p:clrMapOvr>
     <a:masterClrMapping/>
   </p:clrMapOvr>
-  <mc:AlternateContent xmlns:mc="http://schemas.openxmlformats.org/markup-compatibility/2006">
-    <mc:Choice xmlns:p14="http://schemas.microsoft.com/office/powerpoint/2010/main" Requires="p14">
+  <mc:AlternateContent xmlns:mc="http://schemas.openxmlformats.org/markup-compatibility/2006" xmlns:p14="http://schemas.microsoft.com/office/powerpoint/2010/main">
+    <mc:Choice Requires="p14">
       <p:transition spd="slow">
         <p14:reveal/>
       </p:transition>
     </mc:Choice>
-    <mc:Fallback>
+    <mc:Fallback xmlns="">
       <p:transition spd="slow">
         <p:fade/>
       </p:transition>
@@ -8268,8 +8348,8 @@
         </p:nvSpPr>
         <p:spPr>
           <a:xfrm>
-            <a:off x="778510" y="1670050"/>
-            <a:ext cx="3714750" cy="2862322"/>
+            <a:off x="285642" y="1670050"/>
+            <a:ext cx="4340788" cy="2862322"/>
           </a:xfrm>
           <a:prstGeom prst="rect">
             <a:avLst/>
@@ -8306,8 +8386,8 @@
               <a:buChar char="l"/>
             </a:pPr>
             <a:r>
-              <a:rPr lang="en-US" altLang="zh-CN" dirty="0"/>
-              <a:t>LSE</a:t>
+              <a:rPr lang="en-US" altLang="zh-CN" dirty="0" err="1"/>
+              <a:t>LowSpeedExternalClock</a:t>
             </a:r>
             <a:r>
               <a:rPr lang="zh-CN" altLang="en-US" dirty="0"/>
@@ -8321,8 +8401,12 @@
               <a:buChar char="l"/>
             </a:pPr>
             <a:r>
+              <a:rPr lang="en-US" altLang="zh-CN" dirty="0" err="1"/>
+              <a:t>HighSpeedExternalClock</a:t>
+            </a:r>
+            <a:r>
               <a:rPr lang="en-US" altLang="zh-CN" dirty="0"/>
-              <a:t>HSE</a:t>
+              <a:t> </a:t>
             </a:r>
             <a:r>
               <a:rPr lang="zh-CN" altLang="en-US" dirty="0"/>
@@ -8336,8 +8420,12 @@
               <a:buChar char="l"/>
             </a:pPr>
             <a:r>
+              <a:rPr lang="en-US" altLang="zh-CN" dirty="0" err="1"/>
+              <a:t>LowSpeedInternalClock</a:t>
+            </a:r>
+            <a:r>
               <a:rPr lang="en-US" altLang="zh-CN" dirty="0"/>
-              <a:t>LSI</a:t>
+              <a:t> </a:t>
             </a:r>
             <a:r>
               <a:rPr lang="zh-CN" altLang="en-US" dirty="0"/>
@@ -8351,8 +8439,12 @@
               <a:buChar char="l"/>
             </a:pPr>
             <a:r>
+              <a:rPr lang="en-US" altLang="zh-CN" dirty="0" err="1"/>
+              <a:t>HighSpeedInternalClock</a:t>
+            </a:r>
+            <a:r>
               <a:rPr lang="en-US" altLang="zh-CN" dirty="0"/>
-              <a:t>HSI</a:t>
+              <a:t> </a:t>
             </a:r>
             <a:r>
               <a:rPr lang="zh-CN" altLang="en-US" dirty="0"/>
@@ -8474,13 +8566,13 @@
   <p:clrMapOvr>
     <a:masterClrMapping/>
   </p:clrMapOvr>
-  <mc:AlternateContent xmlns:mc="http://schemas.openxmlformats.org/markup-compatibility/2006">
-    <mc:Choice xmlns:p14="http://schemas.microsoft.com/office/powerpoint/2010/main" Requires="p14">
+  <mc:AlternateContent xmlns:mc="http://schemas.openxmlformats.org/markup-compatibility/2006" xmlns:p14="http://schemas.microsoft.com/office/powerpoint/2010/main">
+    <mc:Choice Requires="p14">
       <p:transition spd="slow">
         <p14:reveal/>
       </p:transition>
     </mc:Choice>
-    <mc:Fallback>
+    <mc:Fallback xmlns="">
       <p:transition spd="slow">
         <p:fade/>
       </p:transition>
@@ -9330,7 +9422,7 @@
         <p:spPr>
           <a:xfrm>
             <a:off x="424740" y="1608690"/>
-            <a:ext cx="11287362" cy="4198393"/>
+            <a:ext cx="11287362" cy="4613892"/>
           </a:xfrm>
           <a:prstGeom prst="rect">
             <a:avLst/>
@@ -9376,23 +9468,6 @@
                 <a:latin typeface="微软雅黑"/>
               </a:rPr>
               <a:t>GPIO</a:t>
-            </a:r>
-            <a:r>
-              <a:rPr kumimoji="0" lang="zh-CN" altLang="en-US" b="1" i="0" u="none" strike="noStrike" kern="1200" cap="none" spc="0" normalizeH="0" baseline="0" noProof="0" dirty="0">
-                <a:ln>
-                  <a:noFill/>
-                </a:ln>
-                <a:solidFill>
-                  <a:srgbClr val="122E66"/>
-                </a:solidFill>
-                <a:effectLst/>
-                <a:uLnTx/>
-                <a:uFillTx/>
-                <a:latin typeface="微软雅黑"/>
-                <a:ea typeface="微软雅黑"/>
-                <a:cs typeface="+mn-cs"/>
-              </a:rPr>
-              <a:t>：</a:t>
             </a:r>
             <a:endParaRPr kumimoji="0" lang="en-US" altLang="zh-CN" b="1" i="0" u="none" strike="noStrike" kern="1200" cap="none" spc="0" normalizeH="0" baseline="0" noProof="0" dirty="0">
               <a:ln>
@@ -9555,11 +9630,41 @@
               <a:buChar char="l"/>
             </a:pPr>
             <a:r>
+              <a:rPr lang="en-US" altLang="zh-CN" dirty="0">
+                <a:latin typeface="微软雅黑"/>
+                <a:ea typeface="微软雅黑"/>
+              </a:rPr>
+              <a:t>GPIO</a:t>
+            </a:r>
+            <a:r>
               <a:rPr lang="zh-CN" altLang="en-US" dirty="0">
                 <a:latin typeface="微软雅黑"/>
                 <a:ea typeface="微软雅黑"/>
               </a:rPr>
-              <a:t>需要用一套系统实现：</a:t>
+              <a:t>具有五套系统：</a:t>
+            </a:r>
+            <a:r>
+              <a:rPr lang="en-US" altLang="zh-CN" dirty="0">
+                <a:latin typeface="微软雅黑"/>
+                <a:ea typeface="微软雅黑"/>
+              </a:rPr>
+              <a:t>GPIOA-GPIOE</a:t>
+            </a:r>
+          </a:p>
+          <a:p>
+            <a:pPr marL="742950" lvl="1" indent="-285750">
+              <a:lnSpc>
+                <a:spcPct val="150000"/>
+              </a:lnSpc>
+              <a:buFont typeface="Wingdings" panose="05000000000000000000" pitchFamily="2" charset="2"/>
+              <a:buChar char="l"/>
+            </a:pPr>
+            <a:r>
+              <a:rPr lang="zh-CN" altLang="en-US" dirty="0">
+                <a:latin typeface="微软雅黑"/>
+                <a:ea typeface="微软雅黑"/>
+              </a:rPr>
+              <a:t>每一套系统都需要实现：</a:t>
             </a:r>
             <a:r>
               <a:rPr lang="en-US" altLang="zh-CN" dirty="0">
@@ -9673,13 +9778,13 @@
   <p:clrMapOvr>
     <a:masterClrMapping/>
   </p:clrMapOvr>
-  <mc:AlternateContent xmlns:mc="http://schemas.openxmlformats.org/markup-compatibility/2006">
-    <mc:Choice xmlns:p14="http://schemas.microsoft.com/office/powerpoint/2010/main" Requires="p14">
+  <mc:AlternateContent xmlns:mc="http://schemas.openxmlformats.org/markup-compatibility/2006" xmlns:p14="http://schemas.microsoft.com/office/powerpoint/2010/main">
+    <mc:Choice Requires="p14">
       <p:transition spd="slow">
         <p14:reveal/>
       </p:transition>
     </mc:Choice>
-    <mc:Fallback>
+    <mc:Fallback xmlns="">
       <p:transition spd="slow">
         <p:fade/>
       </p:transition>
@@ -10538,7 +10643,7 @@
         <p:spPr>
           <a:xfrm>
             <a:off x="424740" y="1608690"/>
-            <a:ext cx="4841240" cy="2120902"/>
+            <a:ext cx="4841240" cy="2536400"/>
           </a:xfrm>
           <a:prstGeom prst="rect">
             <a:avLst/>
@@ -10559,6 +10664,38 @@
               <a:buChar char="l"/>
             </a:pPr>
             <a:r>
+              <a:rPr lang="en-US" altLang="zh-CN" b="1" dirty="0">
+                <a:solidFill>
+                  <a:srgbClr val="122E66"/>
+                </a:solidFill>
+                <a:latin typeface="微软雅黑"/>
+              </a:rPr>
+              <a:t>Reference 8.1</a:t>
+            </a:r>
+            <a:endParaRPr kumimoji="0" lang="en-US" altLang="zh-CN" b="1" i="0" u="none" strike="noStrike" kern="1200" cap="none" spc="0" normalizeH="0" baseline="0" noProof="0" dirty="0">
+              <a:ln>
+                <a:noFill/>
+              </a:ln>
+              <a:solidFill>
+                <a:srgbClr val="122E66"/>
+              </a:solidFill>
+              <a:effectLst/>
+              <a:uLnTx/>
+              <a:uFillTx/>
+              <a:latin typeface="微软雅黑"/>
+              <a:ea typeface="微软雅黑"/>
+              <a:cs typeface="+mn-cs"/>
+            </a:endParaRPr>
+          </a:p>
+          <a:p>
+            <a:pPr marL="285750" indent="-285750">
+              <a:lnSpc>
+                <a:spcPct val="150000"/>
+              </a:lnSpc>
+              <a:buFont typeface="Wingdings" panose="05000000000000000000" pitchFamily="2" charset="2"/>
+              <a:buChar char="l"/>
+            </a:pPr>
+            <a:r>
               <a:rPr kumimoji="0" lang="en-US" altLang="zh-CN" b="1" i="0" u="none" strike="noStrike" kern="1200" cap="none" spc="0" normalizeH="0" baseline="0" noProof="0" dirty="0">
                 <a:ln>
                   <a:noFill/>
@@ -10790,10 +10927,10 @@
       </p:sp>
       <p:pic>
         <p:nvPicPr>
-          <p:cNvPr id="7" name="图片 6">
+          <p:cNvPr id="3" name="图片 2">
             <a:extLst>
               <a:ext uri="{FF2B5EF4-FFF2-40B4-BE49-F238E27FC236}">
-                <a16:creationId xmlns:a16="http://schemas.microsoft.com/office/drawing/2014/main" id="{B9449FD4-D6D8-61C3-BE57-4D88BA4097E5}"/>
+                <a16:creationId xmlns:a16="http://schemas.microsoft.com/office/drawing/2014/main" id="{90E22113-C59C-0E96-ED95-4821A7885FAC}"/>
               </a:ext>
             </a:extLst>
           </p:cNvPr>
@@ -10810,7 +10947,7 @@
         </p:blipFill>
         <p:spPr>
           <a:xfrm>
-            <a:off x="5323130" y="1608690"/>
+            <a:off x="5323130" y="1407655"/>
             <a:ext cx="6800284" cy="3909460"/>
           </a:xfrm>
           <a:prstGeom prst="rect">
@@ -10828,13 +10965,13 @@
   <p:clrMapOvr>
     <a:masterClrMapping/>
   </p:clrMapOvr>
-  <mc:AlternateContent xmlns:mc="http://schemas.openxmlformats.org/markup-compatibility/2006">
-    <mc:Choice xmlns:p14="http://schemas.microsoft.com/office/powerpoint/2010/main" Requires="p14">
+  <mc:AlternateContent xmlns:mc="http://schemas.openxmlformats.org/markup-compatibility/2006" xmlns:p14="http://schemas.microsoft.com/office/powerpoint/2010/main">
+    <mc:Choice Requires="p14">
       <p:transition spd="slow">
         <p14:reveal/>
       </p:transition>
     </mc:Choice>
-    <mc:Fallback>
+    <mc:Fallback xmlns="">
       <p:transition spd="slow">
         <p:fade/>
       </p:transition>
@@ -10844,6 +10981,1420 @@
 </file>
 
 <file path=ppt/slides/slide16.xml><?xml version="1.0" encoding="utf-8"?>
+<p:sld xmlns:a="http://schemas.openxmlformats.org/drawingml/2006/main" xmlns:r="http://schemas.openxmlformats.org/officeDocument/2006/relationships" xmlns:p="http://schemas.openxmlformats.org/presentationml/2006/main">
+  <p:cSld>
+    <p:spTree>
+      <p:nvGrpSpPr>
+        <p:cNvPr id="1" name="">
+          <a:extLst>
+            <a:ext uri="{FF2B5EF4-FFF2-40B4-BE49-F238E27FC236}">
+              <a16:creationId xmlns:a16="http://schemas.microsoft.com/office/drawing/2014/main" id="{C67116C2-5806-63D4-31F5-D474E85CC06A}"/>
+            </a:ext>
+          </a:extLst>
+        </p:cNvPr>
+        <p:cNvGrpSpPr/>
+        <p:nvPr/>
+      </p:nvGrpSpPr>
+      <p:grpSpPr>
+        <a:xfrm>
+          <a:off x="0" y="0"/>
+          <a:ext cx="0" cy="0"/>
+          <a:chOff x="0" y="0"/>
+          <a:chExt cx="0" cy="0"/>
+        </a:xfrm>
+      </p:grpSpPr>
+      <p:sp>
+        <p:nvSpPr>
+          <p:cNvPr id="1048717" name="powerpoint template design by DAJU_PPT正版来源小红书大橘PPT微信DAJU_PPT请勿抄袭搬运！盗版必究！">
+            <a:extLst>
+              <a:ext uri="{FF2B5EF4-FFF2-40B4-BE49-F238E27FC236}">
+                <a16:creationId xmlns:a16="http://schemas.microsoft.com/office/drawing/2014/main" id="{35C48481-F2F8-ED64-1132-F884458FD282}"/>
+              </a:ext>
+            </a:extLst>
+          </p:cNvPr>
+          <p:cNvSpPr/>
+          <p:nvPr/>
+        </p:nvSpPr>
+        <p:spPr>
+          <a:xfrm>
+            <a:off x="0" y="-1"/>
+            <a:ext cx="12192000" cy="719633"/>
+          </a:xfrm>
+          <a:prstGeom prst="rect">
+            <a:avLst/>
+          </a:prstGeom>
+          <a:solidFill>
+            <a:schemeClr val="accent1"/>
+          </a:solidFill>
+          <a:ln w="12700" cap="flat" cmpd="sng" algn="ctr">
+            <a:noFill/>
+            <a:prstDash val="solid"/>
+            <a:miter lim="800000"/>
+          </a:ln>
+          <a:effectLst/>
+        </p:spPr>
+        <p:style>
+          <a:lnRef idx="2">
+            <a:schemeClr val="accent1">
+              <a:shade val="50000"/>
+            </a:schemeClr>
+          </a:lnRef>
+          <a:fillRef idx="1">
+            <a:schemeClr val="accent1"/>
+          </a:fillRef>
+          <a:effectRef idx="0">
+            <a:schemeClr val="accent1"/>
+          </a:effectRef>
+          <a:fontRef idx="minor">
+            <a:schemeClr val="lt1"/>
+          </a:fontRef>
+        </p:style>
+        <p:txBody>
+          <a:bodyPr rtlCol="0" anchor="ctr"/>
+          <a:lstStyle/>
+          <a:p>
+            <a:pPr marL="0" lvl="1" algn="ctr">
+              <a:buClrTx/>
+              <a:buSzTx/>
+              <a:buFontTx/>
+            </a:pPr>
+            <a:r>
+              <a:rPr lang="zh-CN" altLang="en-US" sz="2000" kern="0" noProof="0" dirty="0">
+                <a:ln>
+                  <a:noFill/>
+                </a:ln>
+                <a:solidFill>
+                  <a:schemeClr val="bg1">
+                    <a:alpha val="70000"/>
+                  </a:schemeClr>
+                </a:solidFill>
+                <a:effectLst/>
+                <a:uLnTx/>
+                <a:uFillTx/>
+                <a:cs typeface="+mn-ea"/>
+              </a:rPr>
+              <a:t>      </a:t>
+            </a:r>
+            <a:r>
+              <a:rPr lang="en-US" altLang="zh-CN" sz="2000" kern="0" noProof="0" dirty="0">
+                <a:ln>
+                  <a:noFill/>
+                </a:ln>
+                <a:solidFill>
+                  <a:schemeClr val="bg1">
+                    <a:alpha val="70000"/>
+                  </a:schemeClr>
+                </a:solidFill>
+                <a:effectLst/>
+                <a:uLnTx/>
+                <a:uFillTx/>
+                <a:cs typeface="+mn-ea"/>
+              </a:rPr>
+              <a:t>        </a:t>
+            </a:r>
+            <a:r>
+              <a:rPr lang="zh-CN" altLang="en-US" sz="2000" kern="0" noProof="0" dirty="0">
+                <a:ln>
+                  <a:noFill/>
+                </a:ln>
+                <a:solidFill>
+                  <a:schemeClr val="bg1">
+                    <a:alpha val="70000"/>
+                  </a:schemeClr>
+                </a:solidFill>
+                <a:effectLst/>
+                <a:uLnTx/>
+                <a:uFillTx/>
+                <a:cs typeface="+mn-ea"/>
+              </a:rPr>
+              <a:t> </a:t>
+            </a:r>
+            <a:r>
+              <a:rPr lang="en-US" altLang="zh-CN" sz="2000" kern="0" noProof="0" dirty="0">
+                <a:ln>
+                  <a:noFill/>
+                </a:ln>
+                <a:solidFill>
+                  <a:schemeClr val="bg1">
+                    <a:alpha val="70000"/>
+                  </a:schemeClr>
+                </a:solidFill>
+                <a:effectLst/>
+                <a:uLnTx/>
+                <a:uFillTx/>
+                <a:cs typeface="+mn-ea"/>
+              </a:rPr>
+              <a:t>  </a:t>
+            </a:r>
+            <a:r>
+              <a:rPr lang="zh-CN" altLang="en-US" sz="2000" kern="0" noProof="0" dirty="0">
+                <a:ln>
+                  <a:noFill/>
+                </a:ln>
+                <a:solidFill>
+                  <a:schemeClr val="bg1">
+                    <a:alpha val="70000"/>
+                  </a:schemeClr>
+                </a:solidFill>
+                <a:effectLst/>
+                <a:uLnTx/>
+                <a:uFillTx/>
+                <a:cs typeface="+mn-ea"/>
+              </a:rPr>
+              <a:t>选题</a:t>
+            </a:r>
+            <a:r>
+              <a:rPr lang="zh-CN" altLang="en-US" sz="2000" kern="0" dirty="0">
+                <a:solidFill>
+                  <a:schemeClr val="bg1">
+                    <a:alpha val="70000"/>
+                  </a:schemeClr>
+                </a:solidFill>
+                <a:cs typeface="+mn-ea"/>
+              </a:rPr>
+              <a:t>介绍</a:t>
+            </a:r>
+            <a:r>
+              <a:rPr lang="en-US" altLang="zh-CN" sz="2000" kern="0" noProof="0" dirty="0">
+                <a:ln>
+                  <a:noFill/>
+                </a:ln>
+                <a:solidFill>
+                  <a:schemeClr val="bg1">
+                    <a:alpha val="70000"/>
+                  </a:schemeClr>
+                </a:solidFill>
+                <a:effectLst/>
+                <a:uLnTx/>
+                <a:uFillTx/>
+                <a:cs typeface="+mn-ea"/>
+              </a:rPr>
+              <a:t>  </a:t>
+            </a:r>
+          </a:p>
+        </p:txBody>
+      </p:sp>
+      <p:sp>
+        <p:nvSpPr>
+          <p:cNvPr id="1048718" name="powerpoint template design by DAJU_PPT正版来源小红书大橘PPT微信DAJU_PPT请勿抄袭搬运！盗版必究！">
+            <a:extLst>
+              <a:ext uri="{FF2B5EF4-FFF2-40B4-BE49-F238E27FC236}">
+                <a16:creationId xmlns:a16="http://schemas.microsoft.com/office/drawing/2014/main" id="{52AB6509-4064-FD2A-C013-E17AA63C411C}"/>
+              </a:ext>
+            </a:extLst>
+          </p:cNvPr>
+          <p:cNvSpPr txBox="1"/>
+          <p:nvPr userDrawn="1"/>
+        </p:nvSpPr>
+        <p:spPr>
+          <a:xfrm>
+            <a:off x="260350" y="86360"/>
+            <a:ext cx="5848985" cy="633095"/>
+          </a:xfrm>
+          <a:prstGeom prst="rect">
+            <a:avLst/>
+          </a:prstGeom>
+          <a:noFill/>
+        </p:spPr>
+        <p:txBody>
+          <a:bodyPr wrap="square" lIns="252000" rtlCol="0" anchor="ctr" anchorCtr="0">
+            <a:noAutofit/>
+          </a:bodyPr>
+          <a:lstStyle>
+            <a:defPPr>
+              <a:defRPr lang="zh-CN"/>
+            </a:defPPr>
+            <a:lvl1pPr marL="0" algn="l" defTabSz="914400" rtl="0" eaLnBrk="1" latinLnBrk="0" hangingPunct="1">
+              <a:defRPr sz="1800" kern="1200">
+                <a:solidFill>
+                  <a:schemeClr val="tx1"/>
+                </a:solidFill>
+                <a:latin typeface="+mn-lt"/>
+                <a:ea typeface="+mn-ea"/>
+                <a:cs typeface="+mn-cs"/>
+              </a:defRPr>
+            </a:lvl1pPr>
+            <a:lvl2pPr marL="457200" algn="l" defTabSz="914400" rtl="0" eaLnBrk="1" latinLnBrk="0" hangingPunct="1">
+              <a:defRPr sz="1800" kern="1200">
+                <a:solidFill>
+                  <a:schemeClr val="tx1"/>
+                </a:solidFill>
+                <a:latin typeface="+mn-lt"/>
+                <a:ea typeface="+mn-ea"/>
+                <a:cs typeface="+mn-cs"/>
+              </a:defRPr>
+            </a:lvl2pPr>
+            <a:lvl3pPr marL="914400" algn="l" defTabSz="914400" rtl="0" eaLnBrk="1" latinLnBrk="0" hangingPunct="1">
+              <a:defRPr sz="1800" kern="1200">
+                <a:solidFill>
+                  <a:schemeClr val="tx1"/>
+                </a:solidFill>
+                <a:latin typeface="+mn-lt"/>
+                <a:ea typeface="+mn-ea"/>
+                <a:cs typeface="+mn-cs"/>
+              </a:defRPr>
+            </a:lvl3pPr>
+            <a:lvl4pPr marL="1371600" algn="l" defTabSz="914400" rtl="0" eaLnBrk="1" latinLnBrk="0" hangingPunct="1">
+              <a:defRPr sz="1800" kern="1200">
+                <a:solidFill>
+                  <a:schemeClr val="tx1"/>
+                </a:solidFill>
+                <a:latin typeface="+mn-lt"/>
+                <a:ea typeface="+mn-ea"/>
+                <a:cs typeface="+mn-cs"/>
+              </a:defRPr>
+            </a:lvl4pPr>
+            <a:lvl5pPr marL="1828800" algn="l" defTabSz="914400" rtl="0" eaLnBrk="1" latinLnBrk="0" hangingPunct="1">
+              <a:defRPr sz="1800" kern="1200">
+                <a:solidFill>
+                  <a:schemeClr val="tx1"/>
+                </a:solidFill>
+                <a:latin typeface="+mn-lt"/>
+                <a:ea typeface="+mn-ea"/>
+                <a:cs typeface="+mn-cs"/>
+              </a:defRPr>
+            </a:lvl5pPr>
+            <a:lvl6pPr marL="2286000" algn="l" defTabSz="914400" rtl="0" eaLnBrk="1" latinLnBrk="0" hangingPunct="1">
+              <a:defRPr sz="1800" kern="1200">
+                <a:solidFill>
+                  <a:schemeClr val="tx1"/>
+                </a:solidFill>
+                <a:latin typeface="+mn-lt"/>
+                <a:ea typeface="+mn-ea"/>
+                <a:cs typeface="+mn-cs"/>
+              </a:defRPr>
+            </a:lvl6pPr>
+            <a:lvl7pPr marL="2743200" algn="l" defTabSz="914400" rtl="0" eaLnBrk="1" latinLnBrk="0" hangingPunct="1">
+              <a:defRPr sz="1800" kern="1200">
+                <a:solidFill>
+                  <a:schemeClr val="tx1"/>
+                </a:solidFill>
+                <a:latin typeface="+mn-lt"/>
+                <a:ea typeface="+mn-ea"/>
+                <a:cs typeface="+mn-cs"/>
+              </a:defRPr>
+            </a:lvl7pPr>
+            <a:lvl8pPr marL="3200400" algn="l" defTabSz="914400" rtl="0" eaLnBrk="1" latinLnBrk="0" hangingPunct="1">
+              <a:defRPr sz="1800" kern="1200">
+                <a:solidFill>
+                  <a:schemeClr val="tx1"/>
+                </a:solidFill>
+                <a:latin typeface="+mn-lt"/>
+                <a:ea typeface="+mn-ea"/>
+                <a:cs typeface="+mn-cs"/>
+              </a:defRPr>
+            </a:lvl8pPr>
+            <a:lvl9pPr marL="3657600" algn="l" defTabSz="914400" rtl="0" eaLnBrk="1" latinLnBrk="0" hangingPunct="1">
+              <a:defRPr sz="1800" kern="1200">
+                <a:solidFill>
+                  <a:schemeClr val="tx1"/>
+                </a:solidFill>
+                <a:latin typeface="+mn-lt"/>
+                <a:ea typeface="+mn-ea"/>
+                <a:cs typeface="+mn-cs"/>
+              </a:defRPr>
+            </a:lvl9pPr>
+          </a:lstStyle>
+          <a:p>
+            <a:pPr marL="0" lvl="1" algn="ctr"/>
+            <a:endParaRPr kumimoji="0" lang="en-US" altLang="zh-CN" sz="2400" b="1" i="0" u="none" strike="noStrike" kern="0" cap="none" spc="0" normalizeH="0" baseline="0" noProof="0" dirty="0">
+              <a:ln>
+                <a:noFill/>
+              </a:ln>
+              <a:solidFill>
+                <a:schemeClr val="bg1"/>
+              </a:solidFill>
+              <a:effectLst/>
+              <a:uLnTx/>
+              <a:uFillTx/>
+              <a:cs typeface="+mn-ea"/>
+              <a:sym typeface="+mn-ea"/>
+            </a:endParaRPr>
+          </a:p>
+        </p:txBody>
+      </p:sp>
+      <p:sp>
+        <p:nvSpPr>
+          <p:cNvPr id="1048721" name="powerpoint template design by DAJU_PPT正版来源小红书大橘PPT微信DAJU_PPT请勿抄袭搬运！盗版必究！">
+            <a:extLst>
+              <a:ext uri="{FF2B5EF4-FFF2-40B4-BE49-F238E27FC236}">
+                <a16:creationId xmlns:a16="http://schemas.microsoft.com/office/drawing/2014/main" id="{99643050-404D-A287-58E0-26D9FF688FCD}"/>
+              </a:ext>
+            </a:extLst>
+          </p:cNvPr>
+          <p:cNvSpPr txBox="1"/>
+          <p:nvPr userDrawn="1"/>
+        </p:nvSpPr>
+        <p:spPr>
+          <a:xfrm>
+            <a:off x="7333795" y="43234"/>
+            <a:ext cx="2428880" cy="633163"/>
+          </a:xfrm>
+          <a:prstGeom prst="rect">
+            <a:avLst/>
+          </a:prstGeom>
+          <a:noFill/>
+        </p:spPr>
+        <p:txBody>
+          <a:bodyPr wrap="square" lIns="252000" rtlCol="0" anchor="ctr" anchorCtr="0">
+            <a:noAutofit/>
+          </a:bodyPr>
+          <a:lstStyle>
+            <a:defPPr>
+              <a:defRPr lang="zh-CN"/>
+            </a:defPPr>
+            <a:lvl1pPr marL="0" algn="l" defTabSz="914400" rtl="0" eaLnBrk="1" latinLnBrk="0" hangingPunct="1">
+              <a:defRPr sz="1800" kern="1200">
+                <a:solidFill>
+                  <a:schemeClr val="tx1"/>
+                </a:solidFill>
+                <a:latin typeface="+mn-lt"/>
+                <a:ea typeface="+mn-ea"/>
+                <a:cs typeface="+mn-cs"/>
+              </a:defRPr>
+            </a:lvl1pPr>
+            <a:lvl2pPr marL="457200" algn="l" defTabSz="914400" rtl="0" eaLnBrk="1" latinLnBrk="0" hangingPunct="1">
+              <a:defRPr sz="1800" kern="1200">
+                <a:solidFill>
+                  <a:schemeClr val="tx1"/>
+                </a:solidFill>
+                <a:latin typeface="+mn-lt"/>
+                <a:ea typeface="+mn-ea"/>
+                <a:cs typeface="+mn-cs"/>
+              </a:defRPr>
+            </a:lvl2pPr>
+            <a:lvl3pPr marL="914400" algn="l" defTabSz="914400" rtl="0" eaLnBrk="1" latinLnBrk="0" hangingPunct="1">
+              <a:defRPr sz="1800" kern="1200">
+                <a:solidFill>
+                  <a:schemeClr val="tx1"/>
+                </a:solidFill>
+                <a:latin typeface="+mn-lt"/>
+                <a:ea typeface="+mn-ea"/>
+                <a:cs typeface="+mn-cs"/>
+              </a:defRPr>
+            </a:lvl3pPr>
+            <a:lvl4pPr marL="1371600" algn="l" defTabSz="914400" rtl="0" eaLnBrk="1" latinLnBrk="0" hangingPunct="1">
+              <a:defRPr sz="1800" kern="1200">
+                <a:solidFill>
+                  <a:schemeClr val="tx1"/>
+                </a:solidFill>
+                <a:latin typeface="+mn-lt"/>
+                <a:ea typeface="+mn-ea"/>
+                <a:cs typeface="+mn-cs"/>
+              </a:defRPr>
+            </a:lvl4pPr>
+            <a:lvl5pPr marL="1828800" algn="l" defTabSz="914400" rtl="0" eaLnBrk="1" latinLnBrk="0" hangingPunct="1">
+              <a:defRPr sz="1800" kern="1200">
+                <a:solidFill>
+                  <a:schemeClr val="tx1"/>
+                </a:solidFill>
+                <a:latin typeface="+mn-lt"/>
+                <a:ea typeface="+mn-ea"/>
+                <a:cs typeface="+mn-cs"/>
+              </a:defRPr>
+            </a:lvl5pPr>
+            <a:lvl6pPr marL="2286000" algn="l" defTabSz="914400" rtl="0" eaLnBrk="1" latinLnBrk="0" hangingPunct="1">
+              <a:defRPr sz="1800" kern="1200">
+                <a:solidFill>
+                  <a:schemeClr val="tx1"/>
+                </a:solidFill>
+                <a:latin typeface="+mn-lt"/>
+                <a:ea typeface="+mn-ea"/>
+                <a:cs typeface="+mn-cs"/>
+              </a:defRPr>
+            </a:lvl6pPr>
+            <a:lvl7pPr marL="2743200" algn="l" defTabSz="914400" rtl="0" eaLnBrk="1" latinLnBrk="0" hangingPunct="1">
+              <a:defRPr sz="1800" kern="1200">
+                <a:solidFill>
+                  <a:schemeClr val="tx1"/>
+                </a:solidFill>
+                <a:latin typeface="+mn-lt"/>
+                <a:ea typeface="+mn-ea"/>
+                <a:cs typeface="+mn-cs"/>
+              </a:defRPr>
+            </a:lvl7pPr>
+            <a:lvl8pPr marL="3200400" algn="l" defTabSz="914400" rtl="0" eaLnBrk="1" latinLnBrk="0" hangingPunct="1">
+              <a:defRPr sz="1800" kern="1200">
+                <a:solidFill>
+                  <a:schemeClr val="tx1"/>
+                </a:solidFill>
+                <a:latin typeface="+mn-lt"/>
+                <a:ea typeface="+mn-ea"/>
+                <a:cs typeface="+mn-cs"/>
+              </a:defRPr>
+            </a:lvl8pPr>
+            <a:lvl9pPr marL="3657600" algn="l" defTabSz="914400" rtl="0" eaLnBrk="1" latinLnBrk="0" hangingPunct="1">
+              <a:defRPr sz="1800" kern="1200">
+                <a:solidFill>
+                  <a:schemeClr val="tx1"/>
+                </a:solidFill>
+                <a:latin typeface="+mn-lt"/>
+                <a:ea typeface="+mn-ea"/>
+                <a:cs typeface="+mn-cs"/>
+              </a:defRPr>
+            </a:lvl9pPr>
+          </a:lstStyle>
+          <a:p>
+            <a:pPr marL="0" lvl="1" algn="ctr">
+              <a:buClrTx/>
+              <a:buSzTx/>
+              <a:buFontTx/>
+            </a:pPr>
+            <a:r>
+              <a:rPr lang="zh-CN" altLang="en-US" sz="2400" b="1" kern="0" dirty="0">
+                <a:solidFill>
+                  <a:schemeClr val="bg1"/>
+                </a:solidFill>
+                <a:cs typeface="+mn-ea"/>
+                <a:sym typeface="+mn-lt"/>
+              </a:rPr>
+              <a:t>研究内容</a:t>
+            </a:r>
+          </a:p>
+        </p:txBody>
+      </p:sp>
+      <p:cxnSp>
+        <p:nvCxnSpPr>
+          <p:cNvPr id="3145766" name="powerpoint template design by DAJU_PPT正版来源小红书大橘PPT微信DAJU_PPT请勿抄袭搬运！盗版必究！">
+            <a:extLst>
+              <a:ext uri="{FF2B5EF4-FFF2-40B4-BE49-F238E27FC236}">
+                <a16:creationId xmlns:a16="http://schemas.microsoft.com/office/drawing/2014/main" id="{6A64D7DB-5839-3147-B4ED-4537B35CFFAA}"/>
+              </a:ext>
+            </a:extLst>
+          </p:cNvPr>
+          <p:cNvCxnSpPr/>
+          <p:nvPr userDrawn="1"/>
+        </p:nvCxnSpPr>
+        <p:spPr>
+          <a:xfrm>
+            <a:off x="7551599" y="135519"/>
+            <a:ext cx="0" cy="448593"/>
+          </a:xfrm>
+          <a:prstGeom prst="line">
+            <a:avLst/>
+          </a:prstGeom>
+          <a:ln>
+            <a:solidFill>
+              <a:schemeClr val="bg1"/>
+            </a:solidFill>
+          </a:ln>
+        </p:spPr>
+        <p:style>
+          <a:lnRef idx="1">
+            <a:schemeClr val="accent1"/>
+          </a:lnRef>
+          <a:fillRef idx="0">
+            <a:schemeClr val="accent1"/>
+          </a:fillRef>
+          <a:effectRef idx="0">
+            <a:schemeClr val="accent1"/>
+          </a:effectRef>
+          <a:fontRef idx="minor">
+            <a:schemeClr val="tx1"/>
+          </a:fontRef>
+        </p:style>
+      </p:cxnSp>
+      <p:cxnSp>
+        <p:nvCxnSpPr>
+          <p:cNvPr id="3145767" name="powerpoint template design by DAJU_PPT正版来源小红书大橘PPT微信DAJU_PPT请勿抄袭搬运！盗版必究！">
+            <a:extLst>
+              <a:ext uri="{FF2B5EF4-FFF2-40B4-BE49-F238E27FC236}">
+                <a16:creationId xmlns:a16="http://schemas.microsoft.com/office/drawing/2014/main" id="{246FED73-DFCE-52C6-D106-C73520EEC1D0}"/>
+              </a:ext>
+            </a:extLst>
+          </p:cNvPr>
+          <p:cNvCxnSpPr/>
+          <p:nvPr userDrawn="1"/>
+        </p:nvCxnSpPr>
+        <p:spPr>
+          <a:xfrm>
+            <a:off x="9762669" y="136154"/>
+            <a:ext cx="0" cy="448593"/>
+          </a:xfrm>
+          <a:prstGeom prst="line">
+            <a:avLst/>
+          </a:prstGeom>
+          <a:ln>
+            <a:solidFill>
+              <a:schemeClr val="bg1"/>
+            </a:solidFill>
+          </a:ln>
+        </p:spPr>
+        <p:style>
+          <a:lnRef idx="1">
+            <a:schemeClr val="accent1"/>
+          </a:lnRef>
+          <a:fillRef idx="0">
+            <a:schemeClr val="accent1"/>
+          </a:fillRef>
+          <a:effectRef idx="0">
+            <a:schemeClr val="accent1"/>
+          </a:effectRef>
+          <a:fontRef idx="minor">
+            <a:schemeClr val="tx1"/>
+          </a:fontRef>
+        </p:style>
+      </p:cxnSp>
+      <p:sp>
+        <p:nvSpPr>
+          <p:cNvPr id="1048723" name="powerpoint template design by DAJU_PPT正版来源小红书大橘PPT微信DAJU_PPT请勿抄袭搬运！盗版必究！">
+            <a:extLst>
+              <a:ext uri="{FF2B5EF4-FFF2-40B4-BE49-F238E27FC236}">
+                <a16:creationId xmlns:a16="http://schemas.microsoft.com/office/drawing/2014/main" id="{FEA8629C-A153-EAAB-39ED-F7CAFFCC9EDF}"/>
+              </a:ext>
+            </a:extLst>
+          </p:cNvPr>
+          <p:cNvSpPr txBox="1"/>
+          <p:nvPr userDrawn="1"/>
+        </p:nvSpPr>
+        <p:spPr>
+          <a:xfrm>
+            <a:off x="9685655" y="88900"/>
+            <a:ext cx="2184400" cy="541655"/>
+          </a:xfrm>
+          <a:prstGeom prst="rect">
+            <a:avLst/>
+          </a:prstGeom>
+          <a:noFill/>
+        </p:spPr>
+        <p:txBody>
+          <a:bodyPr wrap="square" lIns="252000" rtlCol="0" anchor="ctr" anchorCtr="0">
+            <a:noAutofit/>
+          </a:bodyPr>
+          <a:lstStyle>
+            <a:defPPr>
+              <a:defRPr lang="zh-CN"/>
+            </a:defPPr>
+            <a:lvl1pPr marL="0" algn="l" defTabSz="914400" rtl="0" eaLnBrk="1" latinLnBrk="0" hangingPunct="1">
+              <a:defRPr sz="1800" kern="1200">
+                <a:solidFill>
+                  <a:schemeClr val="tx1"/>
+                </a:solidFill>
+                <a:latin typeface="+mn-lt"/>
+                <a:ea typeface="+mn-ea"/>
+                <a:cs typeface="+mn-cs"/>
+              </a:defRPr>
+            </a:lvl1pPr>
+            <a:lvl2pPr marL="457200" algn="l" defTabSz="914400" rtl="0" eaLnBrk="1" latinLnBrk="0" hangingPunct="1">
+              <a:defRPr sz="1800" kern="1200">
+                <a:solidFill>
+                  <a:schemeClr val="tx1"/>
+                </a:solidFill>
+                <a:latin typeface="+mn-lt"/>
+                <a:ea typeface="+mn-ea"/>
+                <a:cs typeface="+mn-cs"/>
+              </a:defRPr>
+            </a:lvl2pPr>
+            <a:lvl3pPr marL="914400" algn="l" defTabSz="914400" rtl="0" eaLnBrk="1" latinLnBrk="0" hangingPunct="1">
+              <a:defRPr sz="1800" kern="1200">
+                <a:solidFill>
+                  <a:schemeClr val="tx1"/>
+                </a:solidFill>
+                <a:latin typeface="+mn-lt"/>
+                <a:ea typeface="+mn-ea"/>
+                <a:cs typeface="+mn-cs"/>
+              </a:defRPr>
+            </a:lvl3pPr>
+            <a:lvl4pPr marL="1371600" algn="l" defTabSz="914400" rtl="0" eaLnBrk="1" latinLnBrk="0" hangingPunct="1">
+              <a:defRPr sz="1800" kern="1200">
+                <a:solidFill>
+                  <a:schemeClr val="tx1"/>
+                </a:solidFill>
+                <a:latin typeface="+mn-lt"/>
+                <a:ea typeface="+mn-ea"/>
+                <a:cs typeface="+mn-cs"/>
+              </a:defRPr>
+            </a:lvl4pPr>
+            <a:lvl5pPr marL="1828800" algn="l" defTabSz="914400" rtl="0" eaLnBrk="1" latinLnBrk="0" hangingPunct="1">
+              <a:defRPr sz="1800" kern="1200">
+                <a:solidFill>
+                  <a:schemeClr val="tx1"/>
+                </a:solidFill>
+                <a:latin typeface="+mn-lt"/>
+                <a:ea typeface="+mn-ea"/>
+                <a:cs typeface="+mn-cs"/>
+              </a:defRPr>
+            </a:lvl5pPr>
+            <a:lvl6pPr marL="2286000" algn="l" defTabSz="914400" rtl="0" eaLnBrk="1" latinLnBrk="0" hangingPunct="1">
+              <a:defRPr sz="1800" kern="1200">
+                <a:solidFill>
+                  <a:schemeClr val="tx1"/>
+                </a:solidFill>
+                <a:latin typeface="+mn-lt"/>
+                <a:ea typeface="+mn-ea"/>
+                <a:cs typeface="+mn-cs"/>
+              </a:defRPr>
+            </a:lvl6pPr>
+            <a:lvl7pPr marL="2743200" algn="l" defTabSz="914400" rtl="0" eaLnBrk="1" latinLnBrk="0" hangingPunct="1">
+              <a:defRPr sz="1800" kern="1200">
+                <a:solidFill>
+                  <a:schemeClr val="tx1"/>
+                </a:solidFill>
+                <a:latin typeface="+mn-lt"/>
+                <a:ea typeface="+mn-ea"/>
+                <a:cs typeface="+mn-cs"/>
+              </a:defRPr>
+            </a:lvl7pPr>
+            <a:lvl8pPr marL="3200400" algn="l" defTabSz="914400" rtl="0" eaLnBrk="1" latinLnBrk="0" hangingPunct="1">
+              <a:defRPr sz="1800" kern="1200">
+                <a:solidFill>
+                  <a:schemeClr val="tx1"/>
+                </a:solidFill>
+                <a:latin typeface="+mn-lt"/>
+                <a:ea typeface="+mn-ea"/>
+                <a:cs typeface="+mn-cs"/>
+              </a:defRPr>
+            </a:lvl8pPr>
+            <a:lvl9pPr marL="3657600" algn="l" defTabSz="914400" rtl="0" eaLnBrk="1" latinLnBrk="0" hangingPunct="1">
+              <a:defRPr sz="1800" kern="1200">
+                <a:solidFill>
+                  <a:schemeClr val="tx1"/>
+                </a:solidFill>
+                <a:latin typeface="+mn-lt"/>
+                <a:ea typeface="+mn-ea"/>
+                <a:cs typeface="+mn-cs"/>
+              </a:defRPr>
+            </a:lvl9pPr>
+          </a:lstStyle>
+          <a:p>
+            <a:pPr marL="0" lvl="1" algn="ctr">
+              <a:buClrTx/>
+              <a:buSzTx/>
+              <a:buFontTx/>
+            </a:pPr>
+            <a:r>
+              <a:rPr lang="zh-CN" altLang="en-US" sz="2000" kern="0" dirty="0">
+                <a:solidFill>
+                  <a:schemeClr val="bg1">
+                    <a:alpha val="70000"/>
+                  </a:schemeClr>
+                </a:solidFill>
+                <a:cs typeface="+mn-ea"/>
+                <a:sym typeface="+mn-lt"/>
+              </a:rPr>
+              <a:t>总结</a:t>
+            </a:r>
+          </a:p>
+        </p:txBody>
+      </p:sp>
+      <p:pic>
+        <p:nvPicPr>
+          <p:cNvPr id="2097152" name="图片 3">
+            <a:extLst>
+              <a:ext uri="{FF2B5EF4-FFF2-40B4-BE49-F238E27FC236}">
+                <a16:creationId xmlns:a16="http://schemas.microsoft.com/office/drawing/2014/main" id="{D8650F2C-2A38-902F-0B16-4A9A5680C2C5}"/>
+              </a:ext>
+            </a:extLst>
+          </p:cNvPr>
+          <p:cNvPicPr>
+            <a:picLocks noChangeAspect="1"/>
+          </p:cNvPicPr>
+          <p:nvPr/>
+        </p:nvPicPr>
+        <p:blipFill>
+          <a:blip r:embed="rId3"/>
+          <a:stretch>
+            <a:fillRect/>
+          </a:stretch>
+        </p:blipFill>
+        <p:spPr>
+          <a:xfrm>
+            <a:off x="0" y="0"/>
+            <a:ext cx="778510" cy="720090"/>
+          </a:xfrm>
+          <a:prstGeom prst="rect">
+            <a:avLst/>
+          </a:prstGeom>
+        </p:spPr>
+      </p:pic>
+      <p:cxnSp>
+        <p:nvCxnSpPr>
+          <p:cNvPr id="3145768" name="powerpoint template design by DAJU_PPT正版来源小红书大橘PPT微信DAJU_PPT请勿抄袭搬运！盗版必究！">
+            <a:extLst>
+              <a:ext uri="{FF2B5EF4-FFF2-40B4-BE49-F238E27FC236}">
+                <a16:creationId xmlns:a16="http://schemas.microsoft.com/office/drawing/2014/main" id="{56455135-769F-D214-E322-769D1FC5812B}"/>
+              </a:ext>
+            </a:extLst>
+          </p:cNvPr>
+          <p:cNvCxnSpPr/>
+          <p:nvPr/>
+        </p:nvCxnSpPr>
+        <p:spPr>
+          <a:xfrm>
+            <a:off x="481890" y="1341620"/>
+            <a:ext cx="2763480" cy="0"/>
+          </a:xfrm>
+          <a:prstGeom prst="line">
+            <a:avLst/>
+          </a:prstGeom>
+          <a:ln>
+            <a:solidFill>
+              <a:schemeClr val="accent2"/>
+            </a:solidFill>
+          </a:ln>
+        </p:spPr>
+        <p:style>
+          <a:lnRef idx="1">
+            <a:schemeClr val="accent1"/>
+          </a:lnRef>
+          <a:fillRef idx="0">
+            <a:schemeClr val="accent1"/>
+          </a:fillRef>
+          <a:effectRef idx="0">
+            <a:schemeClr val="accent1"/>
+          </a:effectRef>
+          <a:fontRef idx="minor">
+            <a:schemeClr val="tx1"/>
+          </a:fontRef>
+        </p:style>
+      </p:cxnSp>
+      <p:sp>
+        <p:nvSpPr>
+          <p:cNvPr id="4" name="矩形 3">
+            <a:extLst>
+              <a:ext uri="{FF2B5EF4-FFF2-40B4-BE49-F238E27FC236}">
+                <a16:creationId xmlns:a16="http://schemas.microsoft.com/office/drawing/2014/main" id="{0C45CF1C-67DD-8B37-24AC-E88E9FBECA17}"/>
+              </a:ext>
+            </a:extLst>
+          </p:cNvPr>
+          <p:cNvSpPr/>
+          <p:nvPr/>
+        </p:nvSpPr>
+        <p:spPr>
+          <a:xfrm>
+            <a:off x="424740" y="822170"/>
+            <a:ext cx="3459601" cy="461665"/>
+          </a:xfrm>
+          <a:prstGeom prst="rect">
+            <a:avLst/>
+          </a:prstGeom>
+        </p:spPr>
+        <p:txBody>
+          <a:bodyPr wrap="none">
+            <a:spAutoFit/>
+          </a:bodyPr>
+          <a:lstStyle/>
+          <a:p>
+            <a:r>
+              <a:rPr lang="en-US" altLang="zh-CN" sz="2400" b="1" dirty="0">
+                <a:solidFill>
+                  <a:srgbClr val="122E66"/>
+                </a:solidFill>
+                <a:latin typeface="微软雅黑"/>
+              </a:rPr>
+              <a:t>GPIO</a:t>
+            </a:r>
+            <a:r>
+              <a:rPr lang="zh-CN" altLang="en-US" sz="2400" b="1" dirty="0">
+                <a:solidFill>
+                  <a:srgbClr val="122E66"/>
+                </a:solidFill>
+                <a:latin typeface="微软雅黑"/>
+              </a:rPr>
+              <a:t>介绍 </a:t>
+            </a:r>
+            <a:r>
+              <a:rPr lang="en-US" altLang="zh-CN" sz="2400" b="1" dirty="0">
+                <a:solidFill>
+                  <a:srgbClr val="122E66"/>
+                </a:solidFill>
+                <a:latin typeface="微软雅黑"/>
+              </a:rPr>
+              <a:t>/ </a:t>
+            </a:r>
+            <a:r>
+              <a:rPr lang="zh-CN" altLang="en-US" sz="2400" b="1" dirty="0">
+                <a:solidFill>
+                  <a:srgbClr val="122E66"/>
+                </a:solidFill>
+                <a:latin typeface="微软雅黑"/>
+              </a:rPr>
+              <a:t>输出寄存器</a:t>
+            </a:r>
+            <a:endParaRPr lang="zh-CN" altLang="en-US" dirty="0"/>
+          </a:p>
+        </p:txBody>
+      </p:sp>
+      <p:sp>
+        <p:nvSpPr>
+          <p:cNvPr id="2" name="文本框 1">
+            <a:extLst>
+              <a:ext uri="{FF2B5EF4-FFF2-40B4-BE49-F238E27FC236}">
+                <a16:creationId xmlns:a16="http://schemas.microsoft.com/office/drawing/2014/main" id="{FEB255C4-AFAE-1362-2D02-4AE96B37F1E6}"/>
+              </a:ext>
+            </a:extLst>
+          </p:cNvPr>
+          <p:cNvSpPr txBox="1"/>
+          <p:nvPr/>
+        </p:nvSpPr>
+        <p:spPr>
+          <a:xfrm>
+            <a:off x="424740" y="1608690"/>
+            <a:ext cx="5262698" cy="6275885"/>
+          </a:xfrm>
+          <a:prstGeom prst="rect">
+            <a:avLst/>
+          </a:prstGeom>
+          <a:noFill/>
+        </p:spPr>
+        <p:txBody>
+          <a:bodyPr wrap="square">
+            <a:spAutoFit/>
+          </a:bodyPr>
+          <a:lstStyle/>
+          <a:p>
+            <a:pPr marL="285750" indent="-285750">
+              <a:lnSpc>
+                <a:spcPct val="150000"/>
+              </a:lnSpc>
+              <a:buFont typeface="Wingdings" panose="05000000000000000000" pitchFamily="2" charset="2"/>
+              <a:buChar char="l"/>
+            </a:pPr>
+            <a:r>
+              <a:rPr lang="en-US" altLang="zh-CN" b="1" dirty="0">
+                <a:solidFill>
+                  <a:srgbClr val="122E66"/>
+                </a:solidFill>
+                <a:latin typeface="微软雅黑"/>
+              </a:rPr>
+              <a:t>Reference 8.1.2/8.1.8/8.2.4/8.2.5</a:t>
+            </a:r>
+            <a:endParaRPr kumimoji="0" lang="en-US" altLang="zh-CN" b="1" i="0" u="none" strike="noStrike" kern="1200" cap="none" spc="0" normalizeH="0" baseline="0" noProof="0" dirty="0">
+              <a:ln>
+                <a:noFill/>
+              </a:ln>
+              <a:solidFill>
+                <a:srgbClr val="122E66"/>
+              </a:solidFill>
+              <a:effectLst/>
+              <a:uLnTx/>
+              <a:uFillTx/>
+              <a:latin typeface="微软雅黑"/>
+              <a:ea typeface="微软雅黑"/>
+              <a:cs typeface="+mn-cs"/>
+            </a:endParaRPr>
+          </a:p>
+          <a:p>
+            <a:pPr marL="285750" indent="-285750">
+              <a:lnSpc>
+                <a:spcPct val="150000"/>
+              </a:lnSpc>
+              <a:buFont typeface="Wingdings" panose="05000000000000000000" pitchFamily="2" charset="2"/>
+              <a:buChar char="l"/>
+            </a:pPr>
+            <a:r>
+              <a:rPr kumimoji="0" lang="zh-CN" altLang="en-US" b="1" i="0" u="none" strike="noStrike" kern="1200" cap="none" spc="0" normalizeH="0" baseline="0" noProof="0" dirty="0">
+                <a:ln>
+                  <a:noFill/>
+                </a:ln>
+                <a:solidFill>
+                  <a:srgbClr val="122E66"/>
+                </a:solidFill>
+                <a:effectLst/>
+                <a:uLnTx/>
+                <a:uFillTx/>
+                <a:latin typeface="微软雅黑"/>
+                <a:ea typeface="微软雅黑"/>
+                <a:cs typeface="+mn-cs"/>
+              </a:rPr>
+              <a:t>输出数据寄存器</a:t>
+            </a:r>
+            <a:r>
+              <a:rPr kumimoji="0" lang="en-US" altLang="zh-CN" b="1" i="0" u="none" strike="noStrike" kern="1200" cap="none" spc="0" normalizeH="0" baseline="0" noProof="0" dirty="0">
+                <a:ln>
+                  <a:noFill/>
+                </a:ln>
+                <a:solidFill>
+                  <a:srgbClr val="122E66"/>
+                </a:solidFill>
+                <a:effectLst/>
+                <a:uLnTx/>
+                <a:uFillTx/>
+                <a:latin typeface="微软雅黑"/>
+                <a:ea typeface="微软雅黑"/>
+                <a:cs typeface="+mn-cs"/>
+              </a:rPr>
+              <a:t>ODR</a:t>
+            </a:r>
+            <a:r>
+              <a:rPr kumimoji="0" lang="zh-CN" altLang="en-US" b="1" i="0" u="none" strike="noStrike" kern="1200" cap="none" spc="0" normalizeH="0" baseline="0" noProof="0" dirty="0">
+                <a:ln>
+                  <a:noFill/>
+                </a:ln>
+                <a:solidFill>
+                  <a:srgbClr val="122E66"/>
+                </a:solidFill>
+                <a:effectLst/>
+                <a:uLnTx/>
+                <a:uFillTx/>
+                <a:latin typeface="微软雅黑"/>
+                <a:ea typeface="微软雅黑"/>
+                <a:cs typeface="+mn-cs"/>
+              </a:rPr>
+              <a:t>：</a:t>
+            </a:r>
+            <a:endParaRPr lang="en-US" altLang="zh-CN" b="1" dirty="0">
+              <a:solidFill>
+                <a:srgbClr val="122E66"/>
+              </a:solidFill>
+              <a:latin typeface="微软雅黑"/>
+              <a:ea typeface="微软雅黑"/>
+            </a:endParaRPr>
+          </a:p>
+          <a:p>
+            <a:pPr marL="742950" lvl="1" indent="-285750">
+              <a:lnSpc>
+                <a:spcPct val="150000"/>
+              </a:lnSpc>
+              <a:buFont typeface="Wingdings" panose="05000000000000000000" pitchFamily="2" charset="2"/>
+              <a:buChar char="l"/>
+            </a:pPr>
+            <a:r>
+              <a:rPr lang="zh-CN" altLang="en-US" dirty="0">
+                <a:latin typeface="微软雅黑"/>
+              </a:rPr>
+              <a:t>整体控制输出端口</a:t>
+            </a:r>
+            <a:endParaRPr lang="en-US" altLang="zh-CN" dirty="0">
+              <a:latin typeface="微软雅黑"/>
+            </a:endParaRPr>
+          </a:p>
+          <a:p>
+            <a:pPr marL="742950" lvl="1" indent="-285750">
+              <a:lnSpc>
+                <a:spcPct val="150000"/>
+              </a:lnSpc>
+              <a:buFont typeface="Wingdings" panose="05000000000000000000" pitchFamily="2" charset="2"/>
+              <a:buChar char="l"/>
+            </a:pPr>
+            <a:r>
+              <a:rPr lang="zh-CN" altLang="en-US" dirty="0">
+                <a:latin typeface="微软雅黑"/>
+              </a:rPr>
+              <a:t>可以对</a:t>
+            </a:r>
+            <a:r>
+              <a:rPr lang="en-US" altLang="zh-CN" dirty="0">
+                <a:latin typeface="微软雅黑"/>
+              </a:rPr>
+              <a:t>ODR</a:t>
+            </a:r>
+            <a:r>
+              <a:rPr lang="zh-CN" altLang="en-US" dirty="0">
+                <a:latin typeface="微软雅黑"/>
+              </a:rPr>
+              <a:t>进行“软件读</a:t>
+            </a:r>
+            <a:r>
+              <a:rPr lang="en-US" altLang="zh-CN" dirty="0">
+                <a:latin typeface="微软雅黑"/>
+              </a:rPr>
+              <a:t>-</a:t>
+            </a:r>
+            <a:r>
+              <a:rPr lang="zh-CN" altLang="en-US" dirty="0">
+                <a:latin typeface="微软雅黑"/>
+              </a:rPr>
+              <a:t>改</a:t>
+            </a:r>
+            <a:r>
+              <a:rPr lang="en-US" altLang="zh-CN" dirty="0">
+                <a:latin typeface="微软雅黑"/>
+              </a:rPr>
+              <a:t>-</a:t>
+            </a:r>
+            <a:r>
+              <a:rPr lang="zh-CN" altLang="en-US" dirty="0">
+                <a:latin typeface="微软雅黑"/>
+              </a:rPr>
+              <a:t>写”</a:t>
+            </a:r>
+            <a:endParaRPr lang="en-US" altLang="zh-CN" dirty="0">
+              <a:latin typeface="微软雅黑"/>
+            </a:endParaRPr>
+          </a:p>
+          <a:p>
+            <a:pPr marL="742950" lvl="1" indent="-285750">
+              <a:lnSpc>
+                <a:spcPct val="150000"/>
+              </a:lnSpc>
+              <a:buFont typeface="Wingdings" panose="05000000000000000000" pitchFamily="2" charset="2"/>
+              <a:buChar char="l"/>
+            </a:pPr>
+            <a:r>
+              <a:rPr lang="zh-CN" altLang="en-US" dirty="0">
+                <a:latin typeface="微软雅黑"/>
+              </a:rPr>
+              <a:t>即</a:t>
+            </a:r>
+            <a:r>
+              <a:rPr lang="en-US" altLang="zh-CN" dirty="0">
+                <a:latin typeface="微软雅黑"/>
+              </a:rPr>
+              <a:t>ODR |= (1&lt;&lt;5)</a:t>
+            </a:r>
+          </a:p>
+          <a:p>
+            <a:pPr marL="285750" indent="-285750">
+              <a:lnSpc>
+                <a:spcPct val="150000"/>
+              </a:lnSpc>
+              <a:buFont typeface="Wingdings" panose="05000000000000000000" pitchFamily="2" charset="2"/>
+              <a:buChar char="l"/>
+            </a:pPr>
+            <a:r>
+              <a:rPr lang="zh-CN" altLang="en-US" b="1" dirty="0">
+                <a:solidFill>
+                  <a:srgbClr val="122E66"/>
+                </a:solidFill>
+                <a:latin typeface="微软雅黑"/>
+              </a:rPr>
+              <a:t>位设置</a:t>
+            </a:r>
+            <a:r>
+              <a:rPr lang="en-US" altLang="zh-CN" b="1" dirty="0">
+                <a:solidFill>
+                  <a:srgbClr val="122E66"/>
+                </a:solidFill>
+                <a:latin typeface="微软雅黑"/>
+              </a:rPr>
+              <a:t>/</a:t>
+            </a:r>
+            <a:r>
+              <a:rPr lang="zh-CN" altLang="en-US" b="1" dirty="0">
+                <a:solidFill>
+                  <a:srgbClr val="122E66"/>
+                </a:solidFill>
+                <a:latin typeface="微软雅黑"/>
+              </a:rPr>
+              <a:t>清除寄存器</a:t>
+            </a:r>
+            <a:r>
+              <a:rPr lang="en-US" altLang="zh-CN" b="1" dirty="0">
+                <a:solidFill>
+                  <a:srgbClr val="122E66"/>
+                </a:solidFill>
+                <a:latin typeface="微软雅黑"/>
+              </a:rPr>
+              <a:t>BSRR</a:t>
+            </a:r>
+            <a:r>
+              <a:rPr lang="zh-CN" altLang="en-US" b="1" dirty="0">
+                <a:solidFill>
+                  <a:srgbClr val="122E66"/>
+                </a:solidFill>
+                <a:latin typeface="微软雅黑"/>
+              </a:rPr>
+              <a:t>：</a:t>
+            </a:r>
+            <a:endParaRPr lang="en-US" altLang="zh-CN" b="1" dirty="0">
+              <a:solidFill>
+                <a:srgbClr val="122E66"/>
+              </a:solidFill>
+              <a:latin typeface="微软雅黑"/>
+            </a:endParaRPr>
+          </a:p>
+          <a:p>
+            <a:pPr marL="742950" lvl="1" indent="-285750">
+              <a:lnSpc>
+                <a:spcPct val="150000"/>
+              </a:lnSpc>
+              <a:buFont typeface="Wingdings" panose="05000000000000000000" pitchFamily="2" charset="2"/>
+              <a:buChar char="l"/>
+            </a:pPr>
+            <a:r>
+              <a:rPr lang="zh-CN" altLang="en-US" dirty="0">
+                <a:latin typeface="微软雅黑"/>
+              </a:rPr>
+              <a:t>自动对</a:t>
+            </a:r>
+            <a:r>
+              <a:rPr lang="en-US" altLang="zh-CN" dirty="0">
+                <a:latin typeface="微软雅黑"/>
+              </a:rPr>
+              <a:t>ODR</a:t>
+            </a:r>
+            <a:r>
+              <a:rPr lang="zh-CN" altLang="en-US" dirty="0">
+                <a:latin typeface="微软雅黑"/>
+              </a:rPr>
+              <a:t>进行“硬件读</a:t>
+            </a:r>
+            <a:r>
+              <a:rPr lang="en-US" altLang="zh-CN" dirty="0">
+                <a:latin typeface="微软雅黑"/>
+              </a:rPr>
+              <a:t>-</a:t>
+            </a:r>
+            <a:r>
+              <a:rPr lang="zh-CN" altLang="en-US" dirty="0">
+                <a:latin typeface="微软雅黑"/>
+              </a:rPr>
+              <a:t>改</a:t>
+            </a:r>
+            <a:r>
+              <a:rPr lang="en-US" altLang="zh-CN" dirty="0">
+                <a:latin typeface="微软雅黑"/>
+              </a:rPr>
+              <a:t>-</a:t>
+            </a:r>
+            <a:r>
+              <a:rPr lang="zh-CN" altLang="en-US" dirty="0">
+                <a:latin typeface="微软雅黑"/>
+              </a:rPr>
+              <a:t>写”</a:t>
+            </a:r>
+            <a:endParaRPr lang="en-US" altLang="zh-CN" dirty="0">
+              <a:latin typeface="微软雅黑"/>
+            </a:endParaRPr>
+          </a:p>
+          <a:p>
+            <a:pPr marL="742950" lvl="1" indent="-285750">
+              <a:lnSpc>
+                <a:spcPct val="150000"/>
+              </a:lnSpc>
+              <a:buFont typeface="Wingdings" panose="05000000000000000000" pitchFamily="2" charset="2"/>
+              <a:buChar char="l"/>
+            </a:pPr>
+            <a:r>
+              <a:rPr lang="zh-CN" altLang="en-US" dirty="0">
+                <a:latin typeface="微软雅黑"/>
+              </a:rPr>
+              <a:t>从而实现单独控制</a:t>
+            </a:r>
+            <a:r>
+              <a:rPr lang="en-US" altLang="zh-CN" dirty="0">
+                <a:latin typeface="微软雅黑"/>
+              </a:rPr>
+              <a:t>ODR</a:t>
+            </a:r>
+            <a:r>
+              <a:rPr lang="zh-CN" altLang="en-US" dirty="0">
+                <a:latin typeface="微软雅黑"/>
+              </a:rPr>
+              <a:t>每一位</a:t>
+            </a:r>
+            <a:endParaRPr lang="en-US" altLang="zh-CN" dirty="0">
+              <a:latin typeface="微软雅黑"/>
+            </a:endParaRPr>
+          </a:p>
+          <a:p>
+            <a:pPr marL="285750" indent="-285750">
+              <a:lnSpc>
+                <a:spcPct val="150000"/>
+              </a:lnSpc>
+              <a:buFont typeface="Wingdings" panose="05000000000000000000" pitchFamily="2" charset="2"/>
+              <a:buChar char="l"/>
+            </a:pPr>
+            <a:r>
+              <a:rPr lang="en-US" altLang="zh-CN" b="1" dirty="0">
+                <a:solidFill>
+                  <a:srgbClr val="122E66"/>
+                </a:solidFill>
+                <a:latin typeface="微软雅黑"/>
+              </a:rPr>
+              <a:t>ODR</a:t>
+            </a:r>
+            <a:r>
+              <a:rPr lang="zh-CN" altLang="en-US" b="1" dirty="0">
+                <a:solidFill>
+                  <a:srgbClr val="122E66"/>
+                </a:solidFill>
+                <a:latin typeface="微软雅黑"/>
+              </a:rPr>
+              <a:t>可读可写的作用：</a:t>
+            </a:r>
+            <a:endParaRPr lang="en-US" altLang="zh-CN" dirty="0">
+              <a:latin typeface="微软雅黑"/>
+            </a:endParaRPr>
+          </a:p>
+          <a:p>
+            <a:pPr marL="742950" lvl="1" indent="-285750">
+              <a:lnSpc>
+                <a:spcPct val="150000"/>
+              </a:lnSpc>
+              <a:buFont typeface="Wingdings" panose="05000000000000000000" pitchFamily="2" charset="2"/>
+              <a:buChar char="l"/>
+            </a:pPr>
+            <a:r>
+              <a:rPr lang="en-US" altLang="zh-CN" dirty="0">
+                <a:latin typeface="微软雅黑"/>
+              </a:rPr>
+              <a:t>ODR |=(1&lt;&lt;5)</a:t>
+            </a:r>
+            <a:r>
+              <a:rPr lang="zh-CN" altLang="en-US" dirty="0">
+                <a:latin typeface="微软雅黑"/>
+              </a:rPr>
+              <a:t>等价于</a:t>
+            </a:r>
+            <a:r>
+              <a:rPr lang="en-US" altLang="zh-CN" dirty="0">
+                <a:latin typeface="微软雅黑"/>
+              </a:rPr>
+              <a:t>ODR=ODR|(1&lt;&lt;5)</a:t>
+            </a:r>
+          </a:p>
+          <a:p>
+            <a:pPr marL="742950" lvl="1" indent="-285750">
+              <a:lnSpc>
+                <a:spcPct val="150000"/>
+              </a:lnSpc>
+              <a:buFont typeface="Wingdings" panose="05000000000000000000" pitchFamily="2" charset="2"/>
+              <a:buChar char="l"/>
+            </a:pPr>
+            <a:r>
+              <a:rPr lang="zh-CN" altLang="en-US" dirty="0">
+                <a:latin typeface="微软雅黑"/>
+              </a:rPr>
+              <a:t>为了实现对</a:t>
+            </a:r>
+            <a:r>
+              <a:rPr lang="en-US" altLang="zh-CN" dirty="0">
+                <a:latin typeface="微软雅黑"/>
+              </a:rPr>
+              <a:t>ODR</a:t>
+            </a:r>
+            <a:r>
+              <a:rPr lang="zh-CN" altLang="en-US" dirty="0">
+                <a:latin typeface="微软雅黑"/>
+              </a:rPr>
+              <a:t>的“读</a:t>
+            </a:r>
+            <a:r>
+              <a:rPr lang="en-US" altLang="zh-CN" dirty="0">
+                <a:latin typeface="微软雅黑"/>
+              </a:rPr>
+              <a:t>-</a:t>
+            </a:r>
+            <a:r>
+              <a:rPr lang="zh-CN" altLang="en-US" dirty="0">
+                <a:latin typeface="微软雅黑"/>
+              </a:rPr>
+              <a:t>后</a:t>
+            </a:r>
+            <a:r>
+              <a:rPr lang="en-US" altLang="zh-CN" dirty="0">
+                <a:latin typeface="微软雅黑"/>
+              </a:rPr>
+              <a:t>-</a:t>
+            </a:r>
+            <a:r>
+              <a:rPr lang="zh-CN" altLang="en-US" dirty="0">
+                <a:latin typeface="微软雅黑"/>
+              </a:rPr>
+              <a:t>写”，</a:t>
+            </a:r>
+            <a:r>
+              <a:rPr lang="en-US" altLang="zh-CN" dirty="0">
+                <a:latin typeface="微软雅黑"/>
+              </a:rPr>
+              <a:t>ODR</a:t>
+            </a:r>
+            <a:r>
+              <a:rPr lang="zh-CN" altLang="en-US" dirty="0">
+                <a:latin typeface="微软雅黑"/>
+              </a:rPr>
+              <a:t>必须可读可写</a:t>
+            </a:r>
+            <a:endParaRPr lang="en-US" altLang="zh-CN" dirty="0">
+              <a:latin typeface="微软雅黑"/>
+            </a:endParaRPr>
+          </a:p>
+          <a:p>
+            <a:pPr marL="285750" indent="-285750">
+              <a:lnSpc>
+                <a:spcPct val="150000"/>
+              </a:lnSpc>
+              <a:buFont typeface="Wingdings" panose="05000000000000000000" pitchFamily="2" charset="2"/>
+              <a:buChar char="l"/>
+            </a:pPr>
+            <a:endParaRPr lang="en-US" altLang="zh-CN" dirty="0">
+              <a:latin typeface="微软雅黑"/>
+            </a:endParaRPr>
+          </a:p>
+          <a:p>
+            <a:pPr marL="742950" lvl="1" indent="-285750">
+              <a:lnSpc>
+                <a:spcPct val="150000"/>
+              </a:lnSpc>
+              <a:buFont typeface="Wingdings" panose="05000000000000000000" pitchFamily="2" charset="2"/>
+              <a:buChar char="l"/>
+            </a:pPr>
+            <a:endParaRPr lang="en-US" altLang="zh-CN" dirty="0">
+              <a:latin typeface="微软雅黑"/>
+            </a:endParaRPr>
+          </a:p>
+          <a:p>
+            <a:pPr marL="742950" lvl="1" indent="-285750">
+              <a:lnSpc>
+                <a:spcPct val="150000"/>
+              </a:lnSpc>
+              <a:buFont typeface="Wingdings" panose="05000000000000000000" pitchFamily="2" charset="2"/>
+              <a:buChar char="l"/>
+            </a:pPr>
+            <a:endParaRPr lang="en-US" altLang="zh-CN" dirty="0">
+              <a:latin typeface="微软雅黑"/>
+            </a:endParaRPr>
+          </a:p>
+        </p:txBody>
+      </p:sp>
+      <p:pic>
+        <p:nvPicPr>
+          <p:cNvPr id="3" name="图片 2">
+            <a:extLst>
+              <a:ext uri="{FF2B5EF4-FFF2-40B4-BE49-F238E27FC236}">
+                <a16:creationId xmlns:a16="http://schemas.microsoft.com/office/drawing/2014/main" id="{87C5F1EE-BDE3-8663-CAD8-8AD8C467E3FB}"/>
+              </a:ext>
+            </a:extLst>
+          </p:cNvPr>
+          <p:cNvPicPr>
+            <a:picLocks noChangeAspect="1"/>
+          </p:cNvPicPr>
+          <p:nvPr/>
+        </p:nvPicPr>
+        <p:blipFill>
+          <a:blip r:embed="rId4"/>
+          <a:stretch>
+            <a:fillRect/>
+          </a:stretch>
+        </p:blipFill>
+        <p:spPr>
+          <a:xfrm>
+            <a:off x="5323130" y="1407655"/>
+            <a:ext cx="6800284" cy="3909460"/>
+          </a:xfrm>
+          <a:prstGeom prst="rect">
+            <a:avLst/>
+          </a:prstGeom>
+        </p:spPr>
+      </p:pic>
+    </p:spTree>
+    <p:extLst>
+      <p:ext uri="{BB962C8B-B14F-4D97-AF65-F5344CB8AC3E}">
+        <p14:creationId xmlns:p14="http://schemas.microsoft.com/office/powerpoint/2010/main" val="3292631991"/>
+      </p:ext>
+    </p:extLst>
+  </p:cSld>
+  <p:clrMapOvr>
+    <a:masterClrMapping/>
+  </p:clrMapOvr>
+  <mc:AlternateContent xmlns:mc="http://schemas.openxmlformats.org/markup-compatibility/2006" xmlns:p14="http://schemas.microsoft.com/office/powerpoint/2010/main">
+    <mc:Choice Requires="p14">
+      <p:transition spd="slow">
+        <p14:reveal/>
+      </p:transition>
+    </mc:Choice>
+    <mc:Fallback xmlns="">
+      <p:transition spd="slow">
+        <p:fade/>
+      </p:transition>
+    </mc:Fallback>
+  </mc:AlternateContent>
+</p:sld>
+</file>
+
+<file path=ppt/slides/slide17.xml><?xml version="1.0" encoding="utf-8"?>
 <p:sld xmlns:a="http://schemas.openxmlformats.org/drawingml/2006/main" xmlns:r="http://schemas.openxmlformats.org/officeDocument/2006/relationships" xmlns:p="http://schemas.openxmlformats.org/presentationml/2006/main">
   <p:cSld>
     <p:spTree>
@@ -11693,7 +13244,7 @@
         <p:spPr>
           <a:xfrm>
             <a:off x="424740" y="1608690"/>
-            <a:ext cx="6014160" cy="1705403"/>
+            <a:ext cx="6014160" cy="2120902"/>
           </a:xfrm>
           <a:prstGeom prst="rect">
             <a:avLst/>
@@ -11857,7 +13408,7 @@
                 <a:latin typeface="微软雅黑"/>
                 <a:ea typeface="微软雅黑"/>
               </a:rPr>
-              <a:t>高电平 </a:t>
+              <a:t>高电平（拉电流） </a:t>
             </a:r>
             <a:r>
               <a:rPr lang="en-US" altLang="zh-CN" dirty="0">
@@ -11871,7 +13422,7 @@
                 <a:latin typeface="微软雅黑"/>
                 <a:ea typeface="微软雅黑"/>
               </a:rPr>
-              <a:t>低电平</a:t>
+              <a:t>低电平（灌电流）</a:t>
             </a:r>
             <a:endParaRPr lang="en-US" altLang="zh-CN" dirty="0">
               <a:latin typeface="微软雅黑"/>
@@ -11944,7 +13495,38 @@
             </a:r>
             <a:endParaRPr lang="en-US" altLang="zh-CN" dirty="0">
               <a:latin typeface="微软雅黑"/>
+              <a:ea typeface="微软雅黑"/>
             </a:endParaRPr>
+          </a:p>
+          <a:p>
+            <a:pPr marL="1200150" lvl="2" indent="-285750">
+              <a:lnSpc>
+                <a:spcPct val="150000"/>
+              </a:lnSpc>
+              <a:buFont typeface="Wingdings" panose="05000000000000000000" pitchFamily="2" charset="2"/>
+              <a:buChar char="l"/>
+            </a:pPr>
+            <a:r>
+              <a:rPr lang="zh-CN" altLang="en-US" dirty="0">
+                <a:latin typeface="微软雅黑"/>
+                <a:ea typeface="微软雅黑"/>
+              </a:rPr>
+              <a:t>可以自行通过学习</a:t>
+            </a:r>
+            <a:r>
+              <a:rPr lang="en-US" altLang="zh-CN" dirty="0">
+                <a:latin typeface="微软雅黑"/>
+                <a:ea typeface="微软雅黑"/>
+              </a:rPr>
+              <a:t>I2C</a:t>
+            </a:r>
+            <a:r>
+              <a:rPr lang="zh-CN" altLang="en-US" dirty="0">
+                <a:latin typeface="微软雅黑"/>
+                <a:ea typeface="微软雅黑"/>
+              </a:rPr>
+              <a:t>来了解开漏的作用</a:t>
+            </a:r>
           </a:p>
         </p:txBody>
       </p:sp>
@@ -11970,7 +13552,7 @@
         </p:blipFill>
         <p:spPr>
           <a:xfrm>
-            <a:off x="778510" y="3429000"/>
+            <a:off x="778510" y="3720831"/>
             <a:ext cx="5148944" cy="2960110"/>
           </a:xfrm>
           <a:prstGeom prst="rect">
@@ -12048,13 +13630,13 @@
   <p:clrMapOvr>
     <a:masterClrMapping/>
   </p:clrMapOvr>
-  <mc:AlternateContent xmlns:mc="http://schemas.openxmlformats.org/markup-compatibility/2006">
-    <mc:Choice xmlns:p14="http://schemas.microsoft.com/office/powerpoint/2010/main" Requires="p14">
+  <mc:AlternateContent xmlns:mc="http://schemas.openxmlformats.org/markup-compatibility/2006" xmlns:p14="http://schemas.microsoft.com/office/powerpoint/2010/main">
+    <mc:Choice Requires="p14">
       <p:transition spd="slow">
         <p14:reveal/>
       </p:transition>
     </mc:Choice>
-    <mc:Fallback>
+    <mc:Fallback xmlns="">
       <p:transition spd="slow">
         <p:fade/>
       </p:transition>
@@ -12063,7 +13645,7 @@
 </p:sld>
 </file>
 
-<file path=ppt/slides/slide17.xml><?xml version="1.0" encoding="utf-8"?>
+<file path=ppt/slides/slide18.xml><?xml version="1.0" encoding="utf-8"?>
 <p:sld xmlns:a="http://schemas.openxmlformats.org/drawingml/2006/main" xmlns:r="http://schemas.openxmlformats.org/officeDocument/2006/relationships" xmlns:p="http://schemas.openxmlformats.org/presentationml/2006/main">
   <p:cSld>
     <p:spTree>
@@ -13271,7 +14853,7 @@
               <a:rPr lang="zh-CN" altLang="en-US" dirty="0">
                 <a:latin typeface="微软雅黑"/>
               </a:rPr>
-              <a:t>，进行系统初始化，比如配置时钟</a:t>
+              <a:t>，进行系统初始化，比如配置时钟树</a:t>
             </a:r>
             <a:endParaRPr lang="en-US" altLang="zh-CN" dirty="0">
               <a:latin typeface="微软雅黑"/>
@@ -13412,13 +14994,13 @@
   <p:clrMapOvr>
     <a:masterClrMapping/>
   </p:clrMapOvr>
-  <mc:AlternateContent xmlns:mc="http://schemas.openxmlformats.org/markup-compatibility/2006">
-    <mc:Choice xmlns:p14="http://schemas.microsoft.com/office/powerpoint/2010/main" Requires="p14">
+  <mc:AlternateContent xmlns:mc="http://schemas.openxmlformats.org/markup-compatibility/2006" xmlns:p14="http://schemas.microsoft.com/office/powerpoint/2010/main">
+    <mc:Choice Requires="p14">
       <p:transition spd="slow">
         <p14:reveal/>
       </p:transition>
     </mc:Choice>
-    <mc:Fallback>
+    <mc:Fallback xmlns="">
       <p:transition spd="slow">
         <p:fade/>
       </p:transition>
@@ -13427,7 +15009,7 @@
 </p:sld>
 </file>
 
-<file path=ppt/slides/slide18.xml><?xml version="1.0" encoding="utf-8"?>
+<file path=ppt/slides/slide19.xml><?xml version="1.0" encoding="utf-8"?>
 <p:sld xmlns:a="http://schemas.openxmlformats.org/drawingml/2006/main" xmlns:r="http://schemas.openxmlformats.org/officeDocument/2006/relationships" xmlns:p="http://schemas.openxmlformats.org/presentationml/2006/main">
   <p:cSld>
     <p:spTree>
@@ -14249,7 +15831,7 @@
         <p:spPr>
           <a:xfrm>
             <a:off x="389255" y="1917432"/>
-            <a:ext cx="11059795" cy="2585323"/>
+            <a:ext cx="11059795" cy="1477328"/>
           </a:xfrm>
           <a:prstGeom prst="rect">
             <a:avLst/>
@@ -14364,64 +15946,13 @@
             </a:r>
             <a:r>
               <a:rPr lang="zh-CN" altLang="en-US" dirty="0"/>
-              <a:t>进行介绍。</a:t>
-            </a:r>
-            <a:br>
-              <a:rPr lang="en-US" altLang="zh-CN" dirty="0"/>
-            </a:br>
-            <a:endParaRPr lang="en-US" altLang="zh-CN" dirty="0"/>
-          </a:p>
-          <a:p>
-            <a:pPr marL="285750" indent="-285750">
-              <a:buFont typeface="Wingdings" panose="05000000000000000000" pitchFamily="2" charset="2"/>
-              <a:buChar char="l"/>
-            </a:pPr>
-            <a:r>
-              <a:rPr lang="zh-CN" altLang="en-US" b="1" dirty="0">
-                <a:solidFill>
-                  <a:srgbClr val="122E66"/>
-                </a:solidFill>
-              </a:rPr>
-              <a:t>思考题</a:t>
-            </a:r>
-            <a:endParaRPr lang="en-US" altLang="zh-CN" b="1" dirty="0">
-              <a:solidFill>
-                <a:srgbClr val="122E66"/>
-              </a:solidFill>
-            </a:endParaRPr>
-          </a:p>
-          <a:p>
-            <a:pPr marL="742950" lvl="1" indent="-285750">
-              <a:buFont typeface="Wingdings" panose="05000000000000000000" pitchFamily="2" charset="2"/>
-              <a:buChar char="l"/>
-            </a:pPr>
-            <a:r>
-              <a:rPr lang="zh-CN" altLang="en-US" dirty="0"/>
-              <a:t>为什么</a:t>
-            </a:r>
-            <a:r>
-              <a:rPr lang="en-US" altLang="zh-CN" dirty="0"/>
-              <a:t>GPIO</a:t>
-            </a:r>
-            <a:r>
-              <a:rPr lang="zh-CN" altLang="en-US" dirty="0"/>
-              <a:t>的输出寄存器是可读可写的？</a:t>
-            </a:r>
-            <a:endParaRPr lang="en-US" altLang="zh-CN" dirty="0"/>
-          </a:p>
-          <a:p>
-            <a:pPr marL="742950" lvl="1" indent="-285750">
-              <a:buFont typeface="Wingdings" panose="05000000000000000000" pitchFamily="2" charset="2"/>
-              <a:buChar char="l"/>
-            </a:pPr>
-            <a:r>
-              <a:rPr lang="en-US" altLang="zh-CN" dirty="0"/>
-              <a:t>GPIO</a:t>
-            </a:r>
-            <a:r>
-              <a:rPr lang="zh-CN" altLang="en-US" dirty="0"/>
-              <a:t>的推挽和开漏功能在具体实现上有什么用？</a:t>
-            </a:r>
+              <a:t>进行</a:t>
+            </a:r>
+            <a:r>
+              <a:rPr lang="zh-CN" altLang="en-US"/>
+              <a:t>介绍。</a:t>
+            </a:r>
+            <a:endParaRPr lang="zh-CN" altLang="en-US" dirty="0"/>
           </a:p>
         </p:txBody>
       </p:sp>
@@ -14435,13 +15966,13 @@
   <p:clrMapOvr>
     <a:masterClrMapping/>
   </p:clrMapOvr>
-  <mc:AlternateContent xmlns:mc="http://schemas.openxmlformats.org/markup-compatibility/2006">
-    <mc:Choice xmlns:p14="http://schemas.microsoft.com/office/powerpoint/2010/main" Requires="p14">
+  <mc:AlternateContent xmlns:mc="http://schemas.openxmlformats.org/markup-compatibility/2006" xmlns:p14="http://schemas.microsoft.com/office/powerpoint/2010/main">
+    <mc:Choice Requires="p14">
       <p:transition spd="slow">
         <p14:reveal/>
       </p:transition>
     </mc:Choice>
-    <mc:Fallback>
+    <mc:Fallback xmlns="">
       <p:transition spd="slow">
         <p:fade/>
       </p:transition>
@@ -15263,7 +16794,7 @@
                   <a:srgbClr val="122E66"/>
                 </a:solidFill>
               </a:rPr>
-              <a:t>芯片选型</a:t>
+              <a:t>选型</a:t>
             </a:r>
             <a:r>
               <a:rPr lang="zh-CN" altLang="en-US" b="1" dirty="0"/>
@@ -15385,13 +16916,13 @@
   <p:clrMapOvr>
     <a:masterClrMapping/>
   </p:clrMapOvr>
-  <mc:AlternateContent xmlns:mc="http://schemas.openxmlformats.org/markup-compatibility/2006">
-    <mc:Choice xmlns:p14="http://schemas.microsoft.com/office/powerpoint/2010/main" Requires="p14">
+  <mc:AlternateContent xmlns:mc="http://schemas.openxmlformats.org/markup-compatibility/2006" xmlns:p14="http://schemas.microsoft.com/office/powerpoint/2010/main">
+    <mc:Choice Requires="p14">
       <p:transition spd="slow">
         <p14:reveal/>
       </p:transition>
     </mc:Choice>
-    <mc:Fallback>
+    <mc:Fallback xmlns="">
       <p:transition spd="slow">
         <p:fade/>
       </p:transition>
@@ -16252,7 +17783,7 @@
                   <a:srgbClr val="122E66"/>
                 </a:solidFill>
               </a:rPr>
-              <a:t>内存映像空间</a:t>
+              <a:t>映像空间</a:t>
             </a:r>
             <a:endParaRPr lang="en-US" altLang="zh-CN" sz="2800" b="1" dirty="0">
               <a:solidFill>
@@ -16335,13 +17866,13 @@
   <p:clrMapOvr>
     <a:masterClrMapping/>
   </p:clrMapOvr>
-  <mc:AlternateContent xmlns:mc="http://schemas.openxmlformats.org/markup-compatibility/2006">
-    <mc:Choice xmlns:p14="http://schemas.microsoft.com/office/powerpoint/2010/main" Requires="p14">
+  <mc:AlternateContent xmlns:mc="http://schemas.openxmlformats.org/markup-compatibility/2006" xmlns:p14="http://schemas.microsoft.com/office/powerpoint/2010/main">
+    <mc:Choice Requires="p14">
       <p:transition spd="slow">
         <p14:reveal/>
       </p:transition>
     </mc:Choice>
-    <mc:Fallback>
+    <mc:Fallback xmlns="">
       <p:transition spd="slow">
         <p:fade/>
       </p:transition>
@@ -17542,13 +19073,13 @@
   <p:clrMapOvr>
     <a:masterClrMapping/>
   </p:clrMapOvr>
-  <mc:AlternateContent xmlns:mc="http://schemas.openxmlformats.org/markup-compatibility/2006">
-    <mc:Choice xmlns:p14="http://schemas.microsoft.com/office/powerpoint/2010/main" Requires="p14">
+  <mc:AlternateContent xmlns:mc="http://schemas.openxmlformats.org/markup-compatibility/2006" xmlns:p14="http://schemas.microsoft.com/office/powerpoint/2010/main">
+    <mc:Choice Requires="p14">
       <p:transition spd="slow">
         <p14:reveal/>
       </p:transition>
     </mc:Choice>
-    <mc:Fallback>
+    <mc:Fallback xmlns="">
       <p:transition spd="slow">
         <p:fade/>
       </p:transition>
@@ -18563,13 +20094,13 @@
   <p:clrMapOvr>
     <a:masterClrMapping/>
   </p:clrMapOvr>
-  <mc:AlternateContent xmlns:mc="http://schemas.openxmlformats.org/markup-compatibility/2006">
-    <mc:Choice xmlns:p14="http://schemas.microsoft.com/office/powerpoint/2010/main" Requires="p14">
+  <mc:AlternateContent xmlns:mc="http://schemas.openxmlformats.org/markup-compatibility/2006" xmlns:p14="http://schemas.microsoft.com/office/powerpoint/2010/main">
+    <mc:Choice Requires="p14">
       <p:transition spd="slow">
         <p14:reveal/>
       </p:transition>
     </mc:Choice>
-    <mc:Fallback>
+    <mc:Fallback xmlns="">
       <p:transition spd="slow">
         <p:fade/>
       </p:transition>
@@ -19419,7 +20950,7 @@
         <p:spPr>
           <a:xfrm>
             <a:off x="318067" y="1477268"/>
-            <a:ext cx="7327334" cy="5028941"/>
+            <a:ext cx="7327334" cy="5444439"/>
           </a:xfrm>
           <a:prstGeom prst="rect">
             <a:avLst/>
@@ -19431,6 +20962,32 @@
             <a:spAutoFit/>
           </a:bodyPr>
           <a:lstStyle/>
+          <a:p>
+            <a:pPr marL="285750" indent="-285750">
+              <a:lnSpc>
+                <a:spcPct val="150000"/>
+              </a:lnSpc>
+              <a:buFont typeface="Wingdings" panose="05000000000000000000" pitchFamily="2" charset="2"/>
+              <a:buChar char="l"/>
+            </a:pPr>
+            <a:r>
+              <a:rPr kumimoji="0" lang="en-US" altLang="zh-CN" b="1" i="0" u="none" strike="noStrike" kern="1200" cap="none" spc="0" normalizeH="0" baseline="0" noProof="0" dirty="0">
+                <a:ln>
+                  <a:noFill/>
+                </a:ln>
+                <a:solidFill>
+                  <a:srgbClr val="122E66"/>
+                </a:solidFill>
+                <a:effectLst/>
+                <a:uLnTx/>
+                <a:uFillTx/>
+                <a:latin typeface="微软雅黑"/>
+                <a:ea typeface="微软雅黑"/>
+                <a:cs typeface="+mn-cs"/>
+              </a:rPr>
+              <a:t>Reference 2.1</a:t>
+            </a:r>
+          </a:p>
           <a:p>
             <a:pPr marL="285750" indent="-285750">
               <a:lnSpc>
@@ -19923,13 +21480,13 @@
   <p:clrMapOvr>
     <a:masterClrMapping/>
   </p:clrMapOvr>
-  <mc:AlternateContent xmlns:mc="http://schemas.openxmlformats.org/markup-compatibility/2006">
-    <mc:Choice xmlns:p14="http://schemas.microsoft.com/office/powerpoint/2010/main" Requires="p14">
+  <mc:AlternateContent xmlns:mc="http://schemas.openxmlformats.org/markup-compatibility/2006" xmlns:p14="http://schemas.microsoft.com/office/powerpoint/2010/main">
+    <mc:Choice Requires="p14">
       <p:transition spd="slow">
         <p14:reveal/>
       </p:transition>
     </mc:Choice>
-    <mc:Fallback>
+    <mc:Fallback xmlns="">
       <p:transition spd="slow">
         <p:fade/>
       </p:transition>
@@ -20902,7 +22459,19 @@
               <a:rPr lang="zh-CN" altLang="en-US" dirty="0">
                 <a:latin typeface="微软雅黑"/>
               </a:rPr>
-              <a:t>若同时出现多个访问请求，可通过一定的规则（</a:t>
+              <a:t>若同时出现多个访问请求，</a:t>
+            </a:r>
+            <a:r>
+              <a:rPr lang="en-US" altLang="zh-CN" dirty="0">
+                <a:latin typeface="微软雅黑"/>
+              </a:rPr>
+              <a:t>Arbiter</a:t>
+            </a:r>
+            <a:r>
+              <a:rPr lang="zh-CN" altLang="en-US" dirty="0">
+                <a:latin typeface="微软雅黑"/>
+              </a:rPr>
+              <a:t>可通过一定的规则（</a:t>
             </a:r>
             <a:r>
               <a:rPr lang="en-US" altLang="zh-CN" dirty="0">
@@ -20944,7 +22513,13 @@
               <a:rPr lang="zh-CN" altLang="en-US" dirty="0">
                 <a:latin typeface="微软雅黑"/>
               </a:rPr>
-              <a:t>对于访问的请求，需要根据请求地址，来判断需要连接到哪一个输出端口</a:t>
+              <a:t>对于当前访问的请求，需要根据请求地址，来判断需要连接到哪一个输出端口，并操作</a:t>
+            </a:r>
+            <a:r>
+              <a:rPr lang="en-US" altLang="zh-CN" dirty="0" err="1">
+                <a:latin typeface="微软雅黑"/>
+              </a:rPr>
+              <a:t>XBar</a:t>
             </a:r>
             <a:endParaRPr kumimoji="0" lang="zh-CN" altLang="en-US" i="0" u="none" strike="noStrike" kern="1200" cap="none" spc="0" normalizeH="0" baseline="0" noProof="0" dirty="0">
               <a:ln>
@@ -21000,13 +22575,13 @@
   <p:clrMapOvr>
     <a:masterClrMapping/>
   </p:clrMapOvr>
-  <mc:AlternateContent xmlns:mc="http://schemas.openxmlformats.org/markup-compatibility/2006">
-    <mc:Choice xmlns:p14="http://schemas.microsoft.com/office/powerpoint/2010/main" Requires="p14">
+  <mc:AlternateContent xmlns:mc="http://schemas.openxmlformats.org/markup-compatibility/2006" xmlns:p14="http://schemas.microsoft.com/office/powerpoint/2010/main">
+    <mc:Choice Requires="p14">
       <p:transition spd="slow">
         <p14:reveal/>
       </p:transition>
     </mc:Choice>
-    <mc:Fallback>
+    <mc:Fallback xmlns="">
       <p:transition spd="slow">
         <p:fade/>
       </p:transition>
@@ -21798,7 +23373,7 @@
         <p:spPr>
           <a:xfrm>
             <a:off x="424740" y="822170"/>
-            <a:ext cx="3119893" cy="461665"/>
+            <a:ext cx="2504340" cy="461665"/>
           </a:xfrm>
           <a:prstGeom prst="rect">
             <a:avLst/>
@@ -21817,7 +23392,7 @@
                 </a:solidFill>
                 <a:latin typeface="微软雅黑"/>
               </a:rPr>
-              <a:t>内存映像空间 </a:t>
+              <a:t>映像空间 </a:t>
             </a:r>
             <a:r>
               <a:rPr lang="en-US" altLang="zh-CN" sz="2400" b="1" dirty="0">
@@ -21847,7 +23422,7 @@
         <p:spPr>
           <a:xfrm>
             <a:off x="778510" y="1454208"/>
-            <a:ext cx="4606290" cy="458908"/>
+            <a:ext cx="4606290" cy="2120902"/>
           </a:xfrm>
           <a:prstGeom prst="rect">
             <a:avLst/>
@@ -21946,12 +23521,92 @@
               </a:rPr>
               <a:t>映射。</a:t>
             </a:r>
+            <a:endParaRPr lang="en-US" altLang="zh-CN" dirty="0">
+              <a:latin typeface="微软雅黑"/>
+            </a:endParaRPr>
+          </a:p>
+          <a:p>
+            <a:pPr marL="285750" indent="-285750">
+              <a:lnSpc>
+                <a:spcPct val="150000"/>
+              </a:lnSpc>
+              <a:buFont typeface="Wingdings" panose="05000000000000000000" pitchFamily="2" charset="2"/>
+              <a:buChar char="l"/>
+            </a:pPr>
+            <a:r>
+              <a:rPr lang="en-US" altLang="zh-CN" b="1" dirty="0">
+                <a:solidFill>
+                  <a:schemeClr val="accent1"/>
+                </a:solidFill>
+                <a:latin typeface="微软雅黑"/>
+              </a:rPr>
+              <a:t>MMIO</a:t>
+            </a:r>
+            <a:r>
+              <a:rPr lang="zh-CN" altLang="en-US" b="1" dirty="0">
+                <a:solidFill>
+                  <a:schemeClr val="accent1"/>
+                </a:solidFill>
+                <a:latin typeface="微软雅黑"/>
+              </a:rPr>
+              <a:t>映射：</a:t>
+            </a:r>
             <a:endParaRPr lang="en-US" altLang="zh-CN" b="1" dirty="0">
               <a:solidFill>
-                <a:srgbClr val="122E66"/>
+                <a:schemeClr val="accent1"/>
               </a:solidFill>
               <a:latin typeface="微软雅黑"/>
-              <a:ea typeface="微软雅黑"/>
+            </a:endParaRPr>
+          </a:p>
+          <a:p>
+            <a:pPr marL="742950" lvl="1" indent="-285750">
+              <a:lnSpc>
+                <a:spcPct val="150000"/>
+              </a:lnSpc>
+              <a:buFont typeface="Wingdings" panose="05000000000000000000" pitchFamily="2" charset="2"/>
+              <a:buChar char="l"/>
+            </a:pPr>
+            <a:r>
+              <a:rPr lang="en-US" altLang="zh-CN" dirty="0">
+                <a:latin typeface="微软雅黑"/>
+              </a:rPr>
+              <a:t>Memory-Mapped-Input-Output</a:t>
+            </a:r>
+          </a:p>
+          <a:p>
+            <a:pPr marL="742950" lvl="1" indent="-285750">
+              <a:lnSpc>
+                <a:spcPct val="150000"/>
+              </a:lnSpc>
+              <a:buFont typeface="Wingdings" panose="05000000000000000000" pitchFamily="2" charset="2"/>
+              <a:buChar char="l"/>
+            </a:pPr>
+            <a:r>
+              <a:rPr lang="zh-CN" altLang="en-US" dirty="0">
+                <a:latin typeface="微软雅黑"/>
+              </a:rPr>
+              <a:t>可以统一访问外设与访存的操作</a:t>
+            </a:r>
+            <a:endParaRPr lang="en-US" altLang="zh-CN" dirty="0">
+              <a:latin typeface="微软雅黑"/>
+            </a:endParaRPr>
+          </a:p>
+          <a:p>
+            <a:pPr marL="742950" lvl="1" indent="-285750">
+              <a:lnSpc>
+                <a:spcPct val="150000"/>
+              </a:lnSpc>
+              <a:buFont typeface="Wingdings" panose="05000000000000000000" pitchFamily="2" charset="2"/>
+              <a:buChar char="l"/>
+            </a:pPr>
+            <a:r>
+              <a:rPr lang="zh-CN" altLang="en-US" dirty="0">
+                <a:latin typeface="微软雅黑"/>
+              </a:rPr>
+              <a:t>基于总线矩阵实现</a:t>
+            </a:r>
+            <a:endParaRPr lang="en-US" altLang="zh-CN" dirty="0">
+              <a:latin typeface="微软雅黑"/>
             </a:endParaRPr>
           </a:p>
         </p:txBody>
@@ -21978,7 +23633,7 @@
         </p:blipFill>
         <p:spPr>
           <a:xfrm>
-            <a:off x="1842595" y="1912788"/>
+            <a:off x="5597590" y="1408812"/>
             <a:ext cx="2805549" cy="4858852"/>
           </a:xfrm>
           <a:prstGeom prst="rect">
@@ -22008,8 +23663,8 @@
         </p:blipFill>
         <p:spPr>
           <a:xfrm>
-            <a:off x="6444440" y="1036988"/>
-            <a:ext cx="4606290" cy="5684858"/>
+            <a:off x="8615929" y="1744502"/>
+            <a:ext cx="3315714" cy="4092093"/>
           </a:xfrm>
           <a:prstGeom prst="rect">
             <a:avLst/>
@@ -22026,13 +23681,13 @@
   <p:clrMapOvr>
     <a:masterClrMapping/>
   </p:clrMapOvr>
-  <mc:AlternateContent xmlns:mc="http://schemas.openxmlformats.org/markup-compatibility/2006">
-    <mc:Choice xmlns:p14="http://schemas.microsoft.com/office/powerpoint/2010/main" Requires="p14">
+  <mc:AlternateContent xmlns:mc="http://schemas.openxmlformats.org/markup-compatibility/2006" xmlns:p14="http://schemas.microsoft.com/office/powerpoint/2010/main">
+    <mc:Choice Requires="p14">
       <p:transition spd="slow">
         <p14:reveal/>
       </p:transition>
     </mc:Choice>
-    <mc:Fallback>
+    <mc:Fallback xmlns="">
       <p:transition spd="slow">
         <p:fade/>
       </p:transition>
@@ -22824,7 +24479,7 @@
         <p:spPr>
           <a:xfrm>
             <a:off x="424740" y="822170"/>
-            <a:ext cx="2975495" cy="461665"/>
+            <a:ext cx="2359941" cy="461665"/>
           </a:xfrm>
           <a:prstGeom prst="rect">
             <a:avLst/>
@@ -22843,7 +24498,7 @@
                 </a:solidFill>
                 <a:latin typeface="微软雅黑"/>
               </a:rPr>
-              <a:t>内存映像空间 </a:t>
+              <a:t>映像空间 </a:t>
             </a:r>
             <a:r>
               <a:rPr lang="en-US" altLang="zh-CN" sz="2400" b="1" dirty="0">
@@ -22882,7 +24537,7 @@
         <p:spPr>
           <a:xfrm>
             <a:off x="778510" y="1454208"/>
-            <a:ext cx="5665930" cy="4613892"/>
+            <a:ext cx="5665930" cy="5444888"/>
           </a:xfrm>
           <a:prstGeom prst="rect">
             <a:avLst/>
@@ -22903,6 +24558,25 @@
               <a:buChar char="l"/>
             </a:pPr>
             <a:r>
+              <a:rPr lang="en-US" altLang="zh-CN" b="1" dirty="0">
+                <a:solidFill>
+                  <a:srgbClr val="122E66"/>
+                </a:solidFill>
+                <a:latin typeface="微软雅黑"/>
+                <a:ea typeface="微软雅黑"/>
+              </a:rPr>
+              <a:t>Reference 2.2/2.3/2.4</a:t>
+            </a:r>
+          </a:p>
+          <a:p>
+            <a:pPr marL="285750" indent="-285750">
+              <a:lnSpc>
+                <a:spcPct val="150000"/>
+              </a:lnSpc>
+              <a:buFont typeface="Wingdings" panose="05000000000000000000" pitchFamily="2" charset="2"/>
+              <a:buChar char="l"/>
+            </a:pPr>
+            <a:r>
               <a:rPr lang="zh-CN" altLang="en-US" b="1" dirty="0">
                 <a:solidFill>
                   <a:srgbClr val="122E66"/>
@@ -23201,7 +24875,7 @@
                 <a:ea typeface="微软雅黑"/>
                 <a:cs typeface="+mn-cs"/>
               </a:rPr>
-              <a:t>区的部分作用</a:t>
+              <a:t>区的部分作用：</a:t>
             </a:r>
             <a:endParaRPr kumimoji="0" lang="en-US" altLang="zh-CN" b="1" i="0" u="none" strike="noStrike" kern="1200" cap="none" spc="0" normalizeH="0" baseline="0" noProof="0" dirty="0">
               <a:ln>
@@ -23227,25 +24901,57 @@
               <a:buChar char="l"/>
             </a:pPr>
             <a:r>
+              <a:rPr kumimoji="0" lang="en-US" altLang="zh-CN" i="0" u="none" strike="noStrike" kern="1200" cap="none" spc="0" normalizeH="0" baseline="0" noProof="0" dirty="0">
+                <a:ln>
+                  <a:noFill/>
+                </a:ln>
+                <a:effectLst/>
+                <a:uLnTx/>
+                <a:uFillTx/>
+                <a:latin typeface="微软雅黑"/>
+                <a:ea typeface="微软雅黑"/>
+                <a:cs typeface="+mn-cs"/>
+              </a:rPr>
+              <a:t>S</a:t>
+            </a:r>
+            <a:r>
+              <a:rPr lang="en-US" altLang="zh-CN" dirty="0">
+                <a:latin typeface="微软雅黑"/>
+                <a:ea typeface="微软雅黑"/>
+              </a:rPr>
+              <a:t>TM32F1</a:t>
+            </a:r>
+            <a:r>
               <a:rPr lang="zh-CN" altLang="en-US" dirty="0">
                 <a:latin typeface="微软雅黑"/>
-              </a:rPr>
-              <a:t>当总线矩阵的仲裁器发现要访问</a:t>
+                <a:ea typeface="微软雅黑"/>
+              </a:rPr>
+              <a:t>上电从</a:t>
             </a:r>
             <a:r>
               <a:rPr lang="en-US" altLang="zh-CN" dirty="0">
                 <a:latin typeface="微软雅黑"/>
-              </a:rPr>
-              <a:t>BOOT</a:t>
+                <a:ea typeface="微软雅黑"/>
+              </a:rPr>
+              <a:t>0x00000000</a:t>
             </a:r>
             <a:r>
               <a:rPr lang="zh-CN" altLang="en-US" dirty="0">
                 <a:latin typeface="微软雅黑"/>
-              </a:rPr>
-              <a:t>区时</a:t>
-            </a:r>
-            <a:endParaRPr lang="en-US" altLang="zh-CN" dirty="0">
+                <a:ea typeface="微软雅黑"/>
+              </a:rPr>
+              <a:t>开始执行</a:t>
+            </a:r>
+            <a:endParaRPr kumimoji="0" lang="en-US" altLang="zh-CN" i="0" u="none" strike="noStrike" kern="1200" cap="none" spc="0" normalizeH="0" baseline="0" noProof="0" dirty="0">
+              <a:ln>
+                <a:noFill/>
+              </a:ln>
+              <a:effectLst/>
+              <a:uLnTx/>
+              <a:uFillTx/>
               <a:latin typeface="微软雅黑"/>
+              <a:ea typeface="微软雅黑"/>
+              <a:cs typeface="+mn-cs"/>
             </a:endParaRPr>
           </a:p>
           <a:p>
@@ -23260,21 +24966,71 @@
               <a:rPr lang="zh-CN" altLang="en-US" dirty="0">
                 <a:latin typeface="微软雅黑"/>
               </a:rPr>
+              <a:t>当总线矩阵的</a:t>
+            </a:r>
+            <a:r>
+              <a:rPr lang="en-US" altLang="zh-CN" dirty="0" err="1">
+                <a:latin typeface="微软雅黑"/>
+              </a:rPr>
+              <a:t>XBar</a:t>
+            </a:r>
+            <a:r>
+              <a:rPr lang="zh-CN" altLang="en-US" dirty="0">
+                <a:latin typeface="微软雅黑"/>
+              </a:rPr>
+              <a:t>发现要访问</a:t>
+            </a:r>
+            <a:r>
+              <a:rPr lang="en-US" altLang="zh-CN" dirty="0">
+                <a:latin typeface="微软雅黑"/>
+              </a:rPr>
+              <a:t>BOOT</a:t>
+            </a:r>
+            <a:r>
+              <a:rPr lang="zh-CN" altLang="en-US" dirty="0">
+                <a:latin typeface="微软雅黑"/>
+              </a:rPr>
+              <a:t>区时</a:t>
+            </a:r>
+            <a:endParaRPr lang="en-US" altLang="zh-CN" dirty="0">
+              <a:latin typeface="微软雅黑"/>
+            </a:endParaRPr>
+          </a:p>
+          <a:p>
+            <a:pPr marL="742950" lvl="1" indent="-285750">
+              <a:lnSpc>
+                <a:spcPct val="150000"/>
+              </a:lnSpc>
+              <a:buFont typeface="Wingdings" panose="05000000000000000000" pitchFamily="2" charset="2"/>
+              <a:buChar char="l"/>
+            </a:pPr>
+            <a:r>
+              <a:rPr lang="zh-CN" altLang="en-US" dirty="0">
+                <a:latin typeface="微软雅黑"/>
+              </a:rPr>
               <a:t>首先，会依据</a:t>
             </a:r>
             <a:r>
-              <a:rPr lang="en-US" altLang="zh-CN" dirty="0"/>
+              <a:rPr lang="en-US" altLang="zh-CN" dirty="0">
+                <a:solidFill>
+                  <a:srgbClr val="C00000"/>
+                </a:solidFill>
+              </a:rPr>
               <a:t>BOOT[1:0]</a:t>
             </a:r>
             <a:r>
-              <a:rPr lang="zh-CN" altLang="en-US" dirty="0"/>
+              <a:rPr lang="zh-CN" altLang="en-US" dirty="0">
+                <a:solidFill>
+                  <a:srgbClr val="C00000"/>
+                </a:solidFill>
+              </a:rPr>
               <a:t>引脚</a:t>
             </a:r>
             <a:r>
               <a:rPr lang="zh-CN" altLang="en-US" dirty="0">
                 <a:latin typeface="微软雅黑"/>
               </a:rPr>
-              <a:t>进行总线仲裁（主</a:t>
+              <a:t>进行选择（即，主</a:t>
             </a:r>
             <a:r>
               <a:rPr lang="en-US" altLang="zh-CN" dirty="0">
@@ -23366,8 +25122,8 @@
         </p:blipFill>
         <p:spPr>
           <a:xfrm>
-            <a:off x="6444440" y="1036988"/>
-            <a:ext cx="4606290" cy="5684858"/>
+            <a:off x="6444439" y="732986"/>
+            <a:ext cx="4969051" cy="6132560"/>
           </a:xfrm>
           <a:prstGeom prst="rect">
             <a:avLst/>
@@ -23384,13 +25140,13 @@
   <p:clrMapOvr>
     <a:masterClrMapping/>
   </p:clrMapOvr>
-  <mc:AlternateContent xmlns:mc="http://schemas.openxmlformats.org/markup-compatibility/2006">
-    <mc:Choice xmlns:p14="http://schemas.microsoft.com/office/powerpoint/2010/main" Requires="p14">
+  <mc:AlternateContent xmlns:mc="http://schemas.openxmlformats.org/markup-compatibility/2006" xmlns:p14="http://schemas.microsoft.com/office/powerpoint/2010/main">
+    <mc:Choice Requires="p14">
       <p:transition spd="slow">
         <p14:reveal/>
       </p:transition>
     </mc:Choice>
-    <mc:Fallback>
+    <mc:Fallback xmlns="">
       <p:transition spd="slow">
         <p:fade/>
       </p:transition>
